--- a/單元4.容器資源配置.pptx
+++ b/單元4.容器資源配置.pptx
@@ -1,6 +1,6 @@
 
 <file path=ppt/presentation.xml><?xml version="1.0" encoding="utf-8"?>
-<p:presentation xmlns:a="http://schemas.openxmlformats.org/drawingml/2006/main" xmlns:r="http://schemas.openxmlformats.org/officeDocument/2006/relationships" xmlns:mc="http://schemas.openxmlformats.org/markup-compatibility/2006" xmlns:mv="urn:schemas-microsoft-com:mac:vml" xmlns:p="http://schemas.openxmlformats.org/presentationml/2006/main" xmlns:c="http://schemas.openxmlformats.org/drawingml/2006/chart" xmlns:dgm="http://schemas.openxmlformats.org/drawingml/2006/diagram" xmlns:o="urn:schemas-microsoft-com:office:office" xmlns:v="urn:schemas-microsoft-com:vml" xmlns:pvml="urn:schemas-microsoft-com:office:powerpoint" xmlns:com="http://schemas.openxmlformats.org/drawingml/2006/compatibility" xmlns:p14="http://schemas.microsoft.com/office/powerpoint/2010/main" xmlns:p15="http://schemas.microsoft.com/office/powerpoint/2012/main" xmlns:ahyp="http://schemas.microsoft.com/office/drawing/2018/hyperlinkcolor" autoCompressPictures="0" strictFirstAndLastChars="0" saveSubsetFonts="1">
+<p:presentation xmlns:a="http://schemas.openxmlformats.org/drawingml/2006/main" xmlns:r="http://schemas.openxmlformats.org/officeDocument/2006/relationships" xmlns:mc="http://schemas.openxmlformats.org/markup-compatibility/2006" xmlns:mv="urn:schemas-microsoft-com:mac:vml" xmlns:p="http://schemas.openxmlformats.org/presentationml/2006/main" xmlns:c="http://schemas.openxmlformats.org/drawingml/2006/chart" xmlns:dgm="http://schemas.openxmlformats.org/drawingml/2006/diagram" xmlns:o="urn:schemas-microsoft-com:office:office" xmlns:v="urn:schemas-microsoft-com:vml" xmlns:pvml="urn:schemas-microsoft-com:office:powerpoint" xmlns:com="http://schemas.openxmlformats.org/drawingml/2006/compatibility" xmlns:p14="http://schemas.microsoft.com/office/powerpoint/2010/main" xmlns:p15="http://schemas.microsoft.com/office/powerpoint/2012/main" xmlns:ahyp="http://schemas.microsoft.com/office/drawing/2018/hyperlinkcolor" autoCompressPictures="0" embedTrueTypeFonts="1" strictFirstAndLastChars="0" saveSubsetFonts="1">
   <p:sldMasterIdLst>
     <p:sldMasterId id="2147483664" r:id="rId3"/>
   </p:sldMasterIdLst>
@@ -36,12 +36,18 @@
     <p:sldId id="281" r:id="rId30"/>
     <p:sldId id="282" r:id="rId31"/>
     <p:sldId id="283" r:id="rId32"/>
-    <p:sldId id="284" r:id="rId33"/>
-    <p:sldId id="285" r:id="rId34"/>
-    <p:sldId id="286" r:id="rId35"/>
   </p:sldIdLst>
   <p:sldSz cy="6858000" cx="12192000"/>
   <p:notesSz cx="6858000" cy="9144000"/>
+  <p:embeddedFontLst>
+    <p:embeddedFont>
+      <p:font typeface="Roboto Mono"/>
+      <p:regular r:id="rId33"/>
+      <p:bold r:id="rId34"/>
+      <p:italic r:id="rId35"/>
+      <p:boldItalic r:id="rId36"/>
+    </p:embeddedFont>
+  </p:embeddedFontLst>
   <p:defaultTextStyle>
     <a:defPPr lvl="0" marR="0" rtl="0" algn="l">
       <a:lnSpc>
@@ -3596,7 +3602,7 @@
       </p:grpSpPr>
       <p:sp>
         <p:nvSpPr>
-          <p:cNvPr id="282" name="Google Shape;282;p23:notes"/>
+          <p:cNvPr id="282" name="Google Shape;282;p24:notes"/>
           <p:cNvSpPr txBox="1"/>
           <p:nvPr>
             <p:ph idx="1" type="body"/>
@@ -3651,7 +3657,7 @@
       </p:sp>
       <p:sp>
         <p:nvSpPr>
-          <p:cNvPr id="283" name="Google Shape;283;p23:notes"/>
+          <p:cNvPr id="283" name="Google Shape;283;p24:notes"/>
           <p:cNvSpPr/>
           <p:nvPr>
             <p:ph idx="2" type="sldImg"/>
@@ -3721,7 +3727,7 @@
       </p:grpSpPr>
       <p:sp>
         <p:nvSpPr>
-          <p:cNvPr id="288" name="Google Shape;288;p24:notes"/>
+          <p:cNvPr id="288" name="Google Shape;288;p27:notes"/>
           <p:cNvSpPr txBox="1"/>
           <p:nvPr>
             <p:ph idx="1" type="body"/>
@@ -3776,7 +3782,7 @@
       </p:sp>
       <p:sp>
         <p:nvSpPr>
-          <p:cNvPr id="289" name="Google Shape;289;p24:notes"/>
+          <p:cNvPr id="289" name="Google Shape;289;p27:notes"/>
           <p:cNvSpPr/>
           <p:nvPr>
             <p:ph idx="2" type="sldImg"/>
@@ -3846,7 +3852,7 @@
       </p:grpSpPr>
       <p:sp>
         <p:nvSpPr>
-          <p:cNvPr id="294" name="Google Shape;294;p25:notes"/>
+          <p:cNvPr id="294" name="Google Shape;294;p28:notes"/>
           <p:cNvSpPr txBox="1"/>
           <p:nvPr>
             <p:ph idx="1" type="body"/>
@@ -3901,7 +3907,7 @@
       </p:sp>
       <p:sp>
         <p:nvSpPr>
-          <p:cNvPr id="295" name="Google Shape;295;p25:notes"/>
+          <p:cNvPr id="295" name="Google Shape;295;p28:notes"/>
           <p:cNvSpPr/>
           <p:nvPr>
             <p:ph idx="2" type="sldImg"/>
@@ -3971,7 +3977,7 @@
       </p:grpSpPr>
       <p:sp>
         <p:nvSpPr>
-          <p:cNvPr id="300" name="Google Shape;300;p26:notes"/>
+          <p:cNvPr id="300" name="Google Shape;300;p29:notes"/>
           <p:cNvSpPr txBox="1"/>
           <p:nvPr>
             <p:ph idx="1" type="body"/>
@@ -4026,7 +4032,7 @@
       </p:sp>
       <p:sp>
         <p:nvSpPr>
-          <p:cNvPr id="301" name="Google Shape;301;p26:notes"/>
+          <p:cNvPr id="301" name="Google Shape;301;p29:notes"/>
           <p:cNvSpPr/>
           <p:nvPr>
             <p:ph idx="2" type="sldImg"/>
@@ -4096,7 +4102,7 @@
       </p:grpSpPr>
       <p:sp>
         <p:nvSpPr>
-          <p:cNvPr id="306" name="Google Shape;306;p27:notes"/>
+          <p:cNvPr id="306" name="Google Shape;306;p30:notes"/>
           <p:cNvSpPr txBox="1"/>
           <p:nvPr>
             <p:ph idx="1" type="body"/>
@@ -4151,7 +4157,7 @@
       </p:sp>
       <p:sp>
         <p:nvSpPr>
-          <p:cNvPr id="307" name="Google Shape;307;p27:notes"/>
+          <p:cNvPr id="307" name="Google Shape;307;p30:notes"/>
           <p:cNvSpPr/>
           <p:nvPr>
             <p:ph idx="2" type="sldImg"/>
@@ -4221,7 +4227,7 @@
       </p:grpSpPr>
       <p:sp>
         <p:nvSpPr>
-          <p:cNvPr id="312" name="Google Shape;312;p28:notes"/>
+          <p:cNvPr id="312" name="Google Shape;312;p31:notes"/>
           <p:cNvSpPr txBox="1"/>
           <p:nvPr>
             <p:ph idx="1" type="body"/>
@@ -4276,132 +4282,7 @@
       </p:sp>
       <p:sp>
         <p:nvSpPr>
-          <p:cNvPr id="313" name="Google Shape;313;p28:notes"/>
-          <p:cNvSpPr/>
-          <p:nvPr>
-            <p:ph idx="2" type="sldImg"/>
-          </p:nvPr>
-        </p:nvSpPr>
-        <p:spPr>
-          <a:xfrm>
-            <a:off x="685800" y="1143000"/>
-            <a:ext cx="5486400" cy="3086100"/>
-          </a:xfrm>
-          <a:custGeom>
-            <a:rect b="b" l="l" r="r" t="t"/>
-            <a:pathLst>
-              <a:path extrusionOk="0" h="120000" w="120000">
-                <a:moveTo>
-                  <a:pt x="0" y="0"/>
-                </a:moveTo>
-                <a:lnTo>
-                  <a:pt x="120000" y="0"/>
-                </a:lnTo>
-                <a:lnTo>
-                  <a:pt x="120000" y="120000"/>
-                </a:lnTo>
-                <a:lnTo>
-                  <a:pt x="0" y="120000"/>
-                </a:lnTo>
-                <a:close/>
-              </a:path>
-            </a:pathLst>
-          </a:custGeom>
-          <a:noFill/>
-          <a:ln cap="flat" cmpd="sng" w="12700">
-            <a:solidFill>
-              <a:srgbClr val="000000"/>
-            </a:solidFill>
-            <a:prstDash val="solid"/>
-            <a:round/>
-            <a:headEnd len="sm" w="sm" type="none"/>
-            <a:tailEnd len="sm" w="sm" type="none"/>
-          </a:ln>
-        </p:spPr>
-      </p:sp>
-    </p:spTree>
-  </p:cSld>
-  <p:clrMapOvr>
-    <a:masterClrMapping/>
-  </p:clrMapOvr>
-</p:notes>
-</file>
-
-<file path=ppt/notesSlides/notesSlide29.xml><?xml version="1.0" encoding="utf-8"?>
-<p:notes xmlns:a="http://schemas.openxmlformats.org/drawingml/2006/main" xmlns:r="http://schemas.openxmlformats.org/officeDocument/2006/relationships" xmlns:mc="http://schemas.openxmlformats.org/markup-compatibility/2006" xmlns:mv="urn:schemas-microsoft-com:mac:vml" xmlns:p="http://schemas.openxmlformats.org/presentationml/2006/main" xmlns:c="http://schemas.openxmlformats.org/drawingml/2006/chart" xmlns:dgm="http://schemas.openxmlformats.org/drawingml/2006/diagram" xmlns:o="urn:schemas-microsoft-com:office:office" xmlns:v="urn:schemas-microsoft-com:vml" xmlns:pvml="urn:schemas-microsoft-com:office:powerpoint" xmlns:com="http://schemas.openxmlformats.org/drawingml/2006/compatibility" xmlns:p14="http://schemas.microsoft.com/office/powerpoint/2010/main" xmlns:p15="http://schemas.microsoft.com/office/powerpoint/2012/main" xmlns:ahyp="http://schemas.microsoft.com/office/drawing/2018/hyperlinkcolor" showMasterPhAnim="0" showMasterSp="0">
-  <p:cSld>
-    <p:spTree>
-      <p:nvGrpSpPr>
-        <p:cNvPr id="317" name="Shape 317"/>
-        <p:cNvGrpSpPr/>
-        <p:nvPr/>
-      </p:nvGrpSpPr>
-      <p:grpSpPr>
-        <a:xfrm>
-          <a:off x="0" y="0"/>
-          <a:ext cx="0" cy="0"/>
-          <a:chOff x="0" y="0"/>
-          <a:chExt cx="0" cy="0"/>
-        </a:xfrm>
-      </p:grpSpPr>
-      <p:sp>
-        <p:nvSpPr>
-          <p:cNvPr id="318" name="Google Shape;318;p29:notes"/>
-          <p:cNvSpPr txBox="1"/>
-          <p:nvPr>
-            <p:ph idx="1" type="body"/>
-          </p:nvPr>
-        </p:nvSpPr>
-        <p:spPr>
-          <a:xfrm>
-            <a:off x="685800" y="4400550"/>
-            <a:ext cx="5486400" cy="3600450"/>
-          </a:xfrm>
-          <a:prstGeom prst="rect">
-            <a:avLst/>
-          </a:prstGeom>
-          <a:noFill/>
-          <a:ln>
-            <a:noFill/>
-          </a:ln>
-        </p:spPr>
-        <p:txBody>
-          <a:bodyPr anchorCtr="0" anchor="t" bIns="45700" lIns="91425" spcFirstLastPara="1" rIns="91425" wrap="square" tIns="45700">
-            <a:noAutofit/>
-          </a:bodyPr>
-          <a:lstStyle/>
-          <a:p>
-            <a:pPr indent="0" lvl="0" marL="0" rtl="0" algn="l">
-              <a:lnSpc>
-                <a:spcPct val="100000"/>
-              </a:lnSpc>
-              <a:spcBef>
-                <a:spcPts val="0"/>
-              </a:spcBef>
-              <a:spcAft>
-                <a:spcPts val="0"/>
-              </a:spcAft>
-              <a:buSzPts val="1400"/>
-              <a:buNone/>
-            </a:pPr>
-            <a:r>
-              <a:t/>
-            </a:r>
-            <a:endParaRPr b="0" i="0" sz="1200" u="none" cap="none" strike="noStrike">
-              <a:solidFill>
-                <a:schemeClr val="dk1"/>
-              </a:solidFill>
-              <a:latin typeface="Calibri"/>
-              <a:ea typeface="Calibri"/>
-              <a:cs typeface="Calibri"/>
-              <a:sym typeface="Calibri"/>
-            </a:endParaRPr>
-          </a:p>
-        </p:txBody>
-      </p:sp>
-      <p:sp>
-        <p:nvSpPr>
-          <p:cNvPr id="319" name="Google Shape;319;p29:notes"/>
+          <p:cNvPr id="313" name="Google Shape;313;p31:notes"/>
           <p:cNvSpPr/>
           <p:nvPr>
             <p:ph idx="2" type="sldImg"/>
@@ -4527,256 +4408,6 @@
       <p:sp>
         <p:nvSpPr>
           <p:cNvPr id="157" name="Google Shape;157;p3:notes"/>
-          <p:cNvSpPr/>
-          <p:nvPr>
-            <p:ph idx="2" type="sldImg"/>
-          </p:nvPr>
-        </p:nvSpPr>
-        <p:spPr>
-          <a:xfrm>
-            <a:off x="685800" y="1143000"/>
-            <a:ext cx="5486400" cy="3086100"/>
-          </a:xfrm>
-          <a:custGeom>
-            <a:rect b="b" l="l" r="r" t="t"/>
-            <a:pathLst>
-              <a:path extrusionOk="0" h="120000" w="120000">
-                <a:moveTo>
-                  <a:pt x="0" y="0"/>
-                </a:moveTo>
-                <a:lnTo>
-                  <a:pt x="120000" y="0"/>
-                </a:lnTo>
-                <a:lnTo>
-                  <a:pt x="120000" y="120000"/>
-                </a:lnTo>
-                <a:lnTo>
-                  <a:pt x="0" y="120000"/>
-                </a:lnTo>
-                <a:close/>
-              </a:path>
-            </a:pathLst>
-          </a:custGeom>
-          <a:noFill/>
-          <a:ln cap="flat" cmpd="sng" w="12700">
-            <a:solidFill>
-              <a:srgbClr val="000000"/>
-            </a:solidFill>
-            <a:prstDash val="solid"/>
-            <a:round/>
-            <a:headEnd len="sm" w="sm" type="none"/>
-            <a:tailEnd len="sm" w="sm" type="none"/>
-          </a:ln>
-        </p:spPr>
-      </p:sp>
-    </p:spTree>
-  </p:cSld>
-  <p:clrMapOvr>
-    <a:masterClrMapping/>
-  </p:clrMapOvr>
-</p:notes>
-</file>
-
-<file path=ppt/notesSlides/notesSlide30.xml><?xml version="1.0" encoding="utf-8"?>
-<p:notes xmlns:a="http://schemas.openxmlformats.org/drawingml/2006/main" xmlns:r="http://schemas.openxmlformats.org/officeDocument/2006/relationships" xmlns:mc="http://schemas.openxmlformats.org/markup-compatibility/2006" xmlns:mv="urn:schemas-microsoft-com:mac:vml" xmlns:p="http://schemas.openxmlformats.org/presentationml/2006/main" xmlns:c="http://schemas.openxmlformats.org/drawingml/2006/chart" xmlns:dgm="http://schemas.openxmlformats.org/drawingml/2006/diagram" xmlns:o="urn:schemas-microsoft-com:office:office" xmlns:v="urn:schemas-microsoft-com:vml" xmlns:pvml="urn:schemas-microsoft-com:office:powerpoint" xmlns:com="http://schemas.openxmlformats.org/drawingml/2006/compatibility" xmlns:p14="http://schemas.microsoft.com/office/powerpoint/2010/main" xmlns:p15="http://schemas.microsoft.com/office/powerpoint/2012/main" xmlns:ahyp="http://schemas.microsoft.com/office/drawing/2018/hyperlinkcolor" showMasterPhAnim="0" showMasterSp="0">
-  <p:cSld>
-    <p:spTree>
-      <p:nvGrpSpPr>
-        <p:cNvPr id="323" name="Shape 323"/>
-        <p:cNvGrpSpPr/>
-        <p:nvPr/>
-      </p:nvGrpSpPr>
-      <p:grpSpPr>
-        <a:xfrm>
-          <a:off x="0" y="0"/>
-          <a:ext cx="0" cy="0"/>
-          <a:chOff x="0" y="0"/>
-          <a:chExt cx="0" cy="0"/>
-        </a:xfrm>
-      </p:grpSpPr>
-      <p:sp>
-        <p:nvSpPr>
-          <p:cNvPr id="324" name="Google Shape;324;p30:notes"/>
-          <p:cNvSpPr txBox="1"/>
-          <p:nvPr>
-            <p:ph idx="1" type="body"/>
-          </p:nvPr>
-        </p:nvSpPr>
-        <p:spPr>
-          <a:xfrm>
-            <a:off x="685800" y="4400550"/>
-            <a:ext cx="5486400" cy="3600450"/>
-          </a:xfrm>
-          <a:prstGeom prst="rect">
-            <a:avLst/>
-          </a:prstGeom>
-          <a:noFill/>
-          <a:ln>
-            <a:noFill/>
-          </a:ln>
-        </p:spPr>
-        <p:txBody>
-          <a:bodyPr anchorCtr="0" anchor="t" bIns="45700" lIns="91425" spcFirstLastPara="1" rIns="91425" wrap="square" tIns="45700">
-            <a:noAutofit/>
-          </a:bodyPr>
-          <a:lstStyle/>
-          <a:p>
-            <a:pPr indent="0" lvl="0" marL="0" rtl="0" algn="l">
-              <a:lnSpc>
-                <a:spcPct val="100000"/>
-              </a:lnSpc>
-              <a:spcBef>
-                <a:spcPts val="0"/>
-              </a:spcBef>
-              <a:spcAft>
-                <a:spcPts val="0"/>
-              </a:spcAft>
-              <a:buSzPts val="1400"/>
-              <a:buNone/>
-            </a:pPr>
-            <a:r>
-              <a:t/>
-            </a:r>
-            <a:endParaRPr b="0" i="0" sz="1200" u="none" cap="none" strike="noStrike">
-              <a:solidFill>
-                <a:schemeClr val="dk1"/>
-              </a:solidFill>
-              <a:latin typeface="Calibri"/>
-              <a:ea typeface="Calibri"/>
-              <a:cs typeface="Calibri"/>
-              <a:sym typeface="Calibri"/>
-            </a:endParaRPr>
-          </a:p>
-        </p:txBody>
-      </p:sp>
-      <p:sp>
-        <p:nvSpPr>
-          <p:cNvPr id="325" name="Google Shape;325;p30:notes"/>
-          <p:cNvSpPr/>
-          <p:nvPr>
-            <p:ph idx="2" type="sldImg"/>
-          </p:nvPr>
-        </p:nvSpPr>
-        <p:spPr>
-          <a:xfrm>
-            <a:off x="685800" y="1143000"/>
-            <a:ext cx="5486400" cy="3086100"/>
-          </a:xfrm>
-          <a:custGeom>
-            <a:rect b="b" l="l" r="r" t="t"/>
-            <a:pathLst>
-              <a:path extrusionOk="0" h="120000" w="120000">
-                <a:moveTo>
-                  <a:pt x="0" y="0"/>
-                </a:moveTo>
-                <a:lnTo>
-                  <a:pt x="120000" y="0"/>
-                </a:lnTo>
-                <a:lnTo>
-                  <a:pt x="120000" y="120000"/>
-                </a:lnTo>
-                <a:lnTo>
-                  <a:pt x="0" y="120000"/>
-                </a:lnTo>
-                <a:close/>
-              </a:path>
-            </a:pathLst>
-          </a:custGeom>
-          <a:noFill/>
-          <a:ln cap="flat" cmpd="sng" w="12700">
-            <a:solidFill>
-              <a:srgbClr val="000000"/>
-            </a:solidFill>
-            <a:prstDash val="solid"/>
-            <a:round/>
-            <a:headEnd len="sm" w="sm" type="none"/>
-            <a:tailEnd len="sm" w="sm" type="none"/>
-          </a:ln>
-        </p:spPr>
-      </p:sp>
-    </p:spTree>
-  </p:cSld>
-  <p:clrMapOvr>
-    <a:masterClrMapping/>
-  </p:clrMapOvr>
-</p:notes>
-</file>
-
-<file path=ppt/notesSlides/notesSlide31.xml><?xml version="1.0" encoding="utf-8"?>
-<p:notes xmlns:a="http://schemas.openxmlformats.org/drawingml/2006/main" xmlns:r="http://schemas.openxmlformats.org/officeDocument/2006/relationships" xmlns:mc="http://schemas.openxmlformats.org/markup-compatibility/2006" xmlns:mv="urn:schemas-microsoft-com:mac:vml" xmlns:p="http://schemas.openxmlformats.org/presentationml/2006/main" xmlns:c="http://schemas.openxmlformats.org/drawingml/2006/chart" xmlns:dgm="http://schemas.openxmlformats.org/drawingml/2006/diagram" xmlns:o="urn:schemas-microsoft-com:office:office" xmlns:v="urn:schemas-microsoft-com:vml" xmlns:pvml="urn:schemas-microsoft-com:office:powerpoint" xmlns:com="http://schemas.openxmlformats.org/drawingml/2006/compatibility" xmlns:p14="http://schemas.microsoft.com/office/powerpoint/2010/main" xmlns:p15="http://schemas.microsoft.com/office/powerpoint/2012/main" xmlns:ahyp="http://schemas.microsoft.com/office/drawing/2018/hyperlinkcolor" showMasterPhAnim="0" showMasterSp="0">
-  <p:cSld>
-    <p:spTree>
-      <p:nvGrpSpPr>
-        <p:cNvPr id="329" name="Shape 329"/>
-        <p:cNvGrpSpPr/>
-        <p:nvPr/>
-      </p:nvGrpSpPr>
-      <p:grpSpPr>
-        <a:xfrm>
-          <a:off x="0" y="0"/>
-          <a:ext cx="0" cy="0"/>
-          <a:chOff x="0" y="0"/>
-          <a:chExt cx="0" cy="0"/>
-        </a:xfrm>
-      </p:grpSpPr>
-      <p:sp>
-        <p:nvSpPr>
-          <p:cNvPr id="330" name="Google Shape;330;p31:notes"/>
-          <p:cNvSpPr txBox="1"/>
-          <p:nvPr>
-            <p:ph idx="1" type="body"/>
-          </p:nvPr>
-        </p:nvSpPr>
-        <p:spPr>
-          <a:xfrm>
-            <a:off x="685800" y="4400550"/>
-            <a:ext cx="5486400" cy="3600450"/>
-          </a:xfrm>
-          <a:prstGeom prst="rect">
-            <a:avLst/>
-          </a:prstGeom>
-          <a:noFill/>
-          <a:ln>
-            <a:noFill/>
-          </a:ln>
-        </p:spPr>
-        <p:txBody>
-          <a:bodyPr anchorCtr="0" anchor="t" bIns="45700" lIns="91425" spcFirstLastPara="1" rIns="91425" wrap="square" tIns="45700">
-            <a:noAutofit/>
-          </a:bodyPr>
-          <a:lstStyle/>
-          <a:p>
-            <a:pPr indent="0" lvl="0" marL="0" rtl="0" algn="l">
-              <a:lnSpc>
-                <a:spcPct val="100000"/>
-              </a:lnSpc>
-              <a:spcBef>
-                <a:spcPts val="0"/>
-              </a:spcBef>
-              <a:spcAft>
-                <a:spcPts val="0"/>
-              </a:spcAft>
-              <a:buSzPts val="1400"/>
-              <a:buNone/>
-            </a:pPr>
-            <a:r>
-              <a:t/>
-            </a:r>
-            <a:endParaRPr b="0" i="0" sz="1200" u="none" cap="none" strike="noStrike">
-              <a:solidFill>
-                <a:schemeClr val="dk1"/>
-              </a:solidFill>
-              <a:latin typeface="Calibri"/>
-              <a:ea typeface="Calibri"/>
-              <a:cs typeface="Calibri"/>
-              <a:sym typeface="Calibri"/>
-            </a:endParaRPr>
-          </a:p>
-        </p:txBody>
-      </p:sp>
-      <p:sp>
-        <p:nvSpPr>
-          <p:cNvPr id="331" name="Google Shape;331;p31:notes"/>
           <p:cNvSpPr/>
           <p:nvPr>
             <p:ph idx="2" type="sldImg"/>
@@ -26826,7 +26457,7 @@
         </p:spPr>
         <p:txBody>
           <a:bodyPr anchorCtr="0" anchor="t" bIns="45700" lIns="91425" spcFirstLastPara="1" rIns="91425" wrap="square" tIns="45700">
-            <a:normAutofit/>
+            <a:normAutofit lnSpcReduction="10000"/>
           </a:bodyPr>
           <a:lstStyle/>
           <a:p>
@@ -26889,7 +26520,23 @@
             </a:pPr>
             <a:r>
               <a:rPr lang="en-US"/>
-              <a:t>docker run -d -p 80xx:8000 --memory=200m --name yourcontainername vsn80395/memoryconfig:1.0.0</a:t>
+              <a:t>docker run -d -p 80</a:t>
+            </a:r>
+            <a:r>
+              <a:rPr lang="en-US"/>
+              <a:t>59</a:t>
+            </a:r>
+            <a:r>
+              <a:rPr lang="en-US"/>
+              <a:t>:8000 --memory=200m</a:t>
+            </a:r>
+            <a:r>
+              <a:rPr lang="en-US"/>
+              <a:t> --memory-swap=200m </a:t>
+            </a:r>
+            <a:r>
+              <a:rPr lang="en-US"/>
+              <a:t> --name yourcontainername vsn80395/memoryconfig:1.0.0</a:t>
             </a:r>
             <a:endParaRPr/>
           </a:p>
@@ -29238,7 +28885,7 @@
         </p:spPr>
         <p:txBody>
           <a:bodyPr anchorCtr="0" anchor="t" bIns="45700" lIns="91425" spcFirstLastPara="1" rIns="91425" wrap="square" tIns="45700">
-            <a:normAutofit/>
+            <a:normAutofit lnSpcReduction="20000"/>
           </a:bodyPr>
           <a:lstStyle/>
           <a:p>
@@ -29373,7 +29020,27 @@
                 <a:cs typeface="Trebuchet MS"/>
                 <a:sym typeface="Trebuchet MS"/>
               </a:rPr>
-              <a:t>例如，執行 docker update 《容器名稱》 --memory=500m，直接修改容器的記憶體上限，以適應新的需求。</a:t>
+              <a:t>例如，執行 docker update 《容器名稱》 --memory=500m</a:t>
+            </a:r>
+            <a:r>
+              <a:rPr lang="en-US"/>
+              <a:t> </a:t>
+            </a:r>
+            <a:r>
+              <a:rPr lang="en-US"/>
+              <a:t>--memory-swap=500m</a:t>
+            </a:r>
+            <a:r>
+              <a:rPr lang="en-US" sz="1600">
+                <a:solidFill>
+                  <a:srgbClr val="3F3F3F"/>
+                </a:solidFill>
+                <a:latin typeface="Trebuchet MS"/>
+                <a:ea typeface="Trebuchet MS"/>
+                <a:cs typeface="Trebuchet MS"/>
+                <a:sym typeface="Trebuchet MS"/>
+              </a:rPr>
+              <a:t>，直接修改容器的記憶體上限，以適應新的需求。</a:t>
             </a:r>
             <a:endParaRPr sz="1600">
               <a:solidFill>
@@ -29406,22 +29073,126 @@
             <a:endParaRPr/>
           </a:p>
           <a:p>
-            <a:pPr indent="-285750" lvl="1" marL="742950" rtl="0" algn="l">
-              <a:lnSpc>
-                <a:spcPct val="100000"/>
-              </a:lnSpc>
-              <a:spcBef>
-                <a:spcPts val="1000"/>
-              </a:spcBef>
-              <a:spcAft>
-                <a:spcPts val="0"/>
-              </a:spcAft>
-              <a:buSzPts val="1280"/>
+            <a:pPr indent="-308610" lvl="1" marL="742950" rtl="0" algn="l">
+              <a:lnSpc>
+                <a:spcPct val="100000"/>
+              </a:lnSpc>
+              <a:spcBef>
+                <a:spcPts val="1000"/>
+              </a:spcBef>
+              <a:spcAft>
+                <a:spcPts val="0"/>
+              </a:spcAft>
+              <a:buSzPts val="1640"/>
               <a:buChar char="►"/>
             </a:pPr>
             <a:r>
-              <a:rPr lang="en-US"/>
-              <a:t>解釋一下需要加上--memory-swap</a:t>
+              <a:rPr lang="en-US">
+                <a:solidFill>
+                  <a:schemeClr val="dk1"/>
+                </a:solidFill>
+                <a:latin typeface="Arial"/>
+                <a:ea typeface="Arial"/>
+                <a:cs typeface="Arial"/>
+                <a:sym typeface="Arial"/>
+              </a:rPr>
+              <a:t>不管調高或調低，建議兩者設為相同，最乾淨也最直覺： </a:t>
+            </a:r>
+            <a:r>
+              <a:rPr lang="en-US">
+                <a:solidFill>
+                  <a:srgbClr val="188038"/>
+                </a:solidFill>
+                <a:latin typeface="Roboto Mono"/>
+                <a:ea typeface="Roboto Mono"/>
+                <a:cs typeface="Roboto Mono"/>
+                <a:sym typeface="Roboto Mono"/>
+              </a:rPr>
+              <a:t>docker update --memory [新數值] --memory-swap [新數值] [容器名稱]</a:t>
+            </a:r>
+            <a:r>
+              <a:rPr lang="en-US">
+                <a:solidFill>
+                  <a:schemeClr val="dk1"/>
+                </a:solidFill>
+                <a:latin typeface="Arial"/>
+                <a:ea typeface="Arial"/>
+                <a:cs typeface="Arial"/>
+                <a:sym typeface="Arial"/>
+              </a:rPr>
+              <a:t> </a:t>
+            </a:r>
+            <a:r>
+              <a:rPr b="1" lang="en-US">
+                <a:solidFill>
+                  <a:schemeClr val="dk1"/>
+                </a:solidFill>
+                <a:latin typeface="Arial"/>
+                <a:ea typeface="Arial"/>
+                <a:cs typeface="Arial"/>
+                <a:sym typeface="Arial"/>
+              </a:rPr>
+              <a:t>優點：</a:t>
+            </a:r>
+            <a:r>
+              <a:rPr lang="en-US">
+                <a:solidFill>
+                  <a:schemeClr val="dk1"/>
+                </a:solidFill>
+                <a:latin typeface="Arial"/>
+                <a:ea typeface="Arial"/>
+                <a:cs typeface="Arial"/>
+                <a:sym typeface="Arial"/>
+              </a:rPr>
+              <a:t> 1. 預防報錯 2. 效能最穩 3. 超過直接重啟（好觀察</a:t>
+            </a:r>
+            <a:r>
+              <a:rPr lang="en-US" sz="1300">
+                <a:solidFill>
+                  <a:schemeClr val="dk1"/>
+                </a:solidFill>
+                <a:latin typeface="Arial"/>
+                <a:ea typeface="Arial"/>
+                <a:cs typeface="Arial"/>
+                <a:sym typeface="Arial"/>
+              </a:rPr>
+              <a:t>） </a:t>
+            </a:r>
+            <a:endParaRPr sz="1800"/>
+          </a:p>
+          <a:p>
+            <a:pPr indent="0" lvl="0" marL="914400" rtl="0" algn="l">
+              <a:lnSpc>
+                <a:spcPct val="100000"/>
+              </a:lnSpc>
+              <a:spcBef>
+                <a:spcPts val="1000"/>
+              </a:spcBef>
+              <a:spcAft>
+                <a:spcPts val="0"/>
+              </a:spcAft>
+              <a:buNone/>
+            </a:pPr>
+            <a:r>
+              <a:t/>
+            </a:r>
+            <a:endParaRPr/>
+          </a:p>
+          <a:p>
+            <a:pPr indent="0" lvl="0" marL="914400" rtl="0" algn="l">
+              <a:lnSpc>
+                <a:spcPct val="100000"/>
+              </a:lnSpc>
+              <a:spcBef>
+                <a:spcPts val="1000"/>
+              </a:spcBef>
+              <a:spcAft>
+                <a:spcPts val="0"/>
+              </a:spcAft>
+              <a:buNone/>
+            </a:pPr>
+            <a:r>
+              <a:t/>
             </a:r>
             <a:endParaRPr/>
           </a:p>
@@ -29550,57 +29321,17 @@
           </a:bodyPr>
           <a:lstStyle/>
           <a:p>
-            <a:pPr indent="-342900" lvl="0" marL="342900" rtl="0" algn="l">
-              <a:lnSpc>
-                <a:spcPct val="100000"/>
-              </a:lnSpc>
-              <a:spcBef>
-                <a:spcPts val="0"/>
-              </a:spcBef>
-              <a:spcAft>
-                <a:spcPts val="0"/>
-              </a:spcAft>
-              <a:buSzPts val="1440"/>
-              <a:buChar char="►"/>
-            </a:pPr>
-            <a:r>
-              <a:rPr lang="en-US"/>
-              <a:t>docker update 把 --memory 往上調，一旦新值 大於目前的 memory-swap，就會被擋下——這時必須同時帶上 --memory-swap，讓「memory ≤ memory-swap」成立</a:t>
-            </a:r>
-            <a:endParaRPr/>
-          </a:p>
-          <a:p>
-            <a:pPr indent="-342900" lvl="0" marL="342900" rtl="0" algn="l">
-              <a:lnSpc>
-                <a:spcPct val="100000"/>
-              </a:lnSpc>
-              <a:spcBef>
-                <a:spcPts val="1000"/>
-              </a:spcBef>
-              <a:spcAft>
-                <a:spcPts val="0"/>
-              </a:spcAft>
-              <a:buSzPts val="1440"/>
-              <a:buChar char="►"/>
-            </a:pPr>
-            <a:r>
-              <a:rPr lang="en-US"/>
-              <a:t>調高 memory → 請同時帶 --memory-swap。</a:t>
-            </a:r>
-            <a:endParaRPr/>
-          </a:p>
-          <a:p>
-            <a:pPr indent="-251460" lvl="0" marL="342900" rtl="0" algn="l">
-              <a:lnSpc>
-                <a:spcPct val="100000"/>
-              </a:lnSpc>
-              <a:spcBef>
-                <a:spcPts val="1000"/>
-              </a:spcBef>
-              <a:spcAft>
-                <a:spcPts val="0"/>
-              </a:spcAft>
-              <a:buSzPts val="1440"/>
+            <a:pPr indent="0" lvl="1" marL="457200" rtl="0" algn="l">
+              <a:lnSpc>
+                <a:spcPct val="100000"/>
+              </a:lnSpc>
+              <a:spcBef>
+                <a:spcPts val="0"/>
+              </a:spcBef>
+              <a:spcAft>
+                <a:spcPts val="0"/>
+              </a:spcAft>
+              <a:buSzPts val="1280"/>
               <a:buNone/>
             </a:pPr>
             <a:r>
@@ -29623,49 +29354,62 @@
               <a:buChar char="►"/>
             </a:pPr>
             <a:r>
-              <a:rPr lang="en-US"/>
-              <a:t>調低 memory → 通常不用帶（因為還是 ≤ 既有的 memory-swap）。</a:t>
+              <a:rPr lang="en-US" sz="1800">
+                <a:solidFill>
+                  <a:srgbClr val="3F3F3F"/>
+                </a:solidFill>
+                <a:latin typeface="Trebuchet MS"/>
+                <a:ea typeface="Trebuchet MS"/>
+                <a:cs typeface="Trebuchet MS"/>
+                <a:sym typeface="Trebuchet MS"/>
+              </a:rPr>
+              <a:t>使用 docker inspect</a:t>
             </a:r>
-            <a:endParaRPr/>
+            <a:endParaRPr sz="1800">
+              <a:solidFill>
+                <a:srgbClr val="3F3F3F"/>
+              </a:solidFill>
+              <a:latin typeface="Trebuchet MS"/>
+              <a:ea typeface="Trebuchet MS"/>
+              <a:cs typeface="Trebuchet MS"/>
+              <a:sym typeface="Trebuchet MS"/>
+            </a:endParaRPr>
           </a:p>
           <a:p>
-            <a:pPr indent="-251460" lvl="0" marL="342900" rtl="0" algn="l">
-              <a:lnSpc>
-                <a:spcPct val="100000"/>
-              </a:lnSpc>
-              <a:spcBef>
-                <a:spcPts val="1000"/>
-              </a:spcBef>
-              <a:spcAft>
-                <a:spcPts val="0"/>
-              </a:spcAft>
-              <a:buSzPts val="1440"/>
-              <a:buNone/>
-            </a:pPr>
-            <a:r>
-              <a:t/>
-            </a:r>
-            <a:endParaRPr/>
-          </a:p>
-          <a:p>
-            <a:pPr indent="-342900" lvl="0" marL="342900" rtl="0" algn="l">
-              <a:lnSpc>
-                <a:spcPct val="100000"/>
-              </a:lnSpc>
-              <a:spcBef>
-                <a:spcPts val="1000"/>
-              </a:spcBef>
-              <a:spcAft>
-                <a:spcPts val="0"/>
-              </a:spcAft>
-              <a:buSzPts val="1440"/>
+            <a:pPr indent="-285750" lvl="1" marL="742950" rtl="0" algn="l">
+              <a:lnSpc>
+                <a:spcPct val="100000"/>
+              </a:lnSpc>
+              <a:spcBef>
+                <a:spcPts val="1000"/>
+              </a:spcBef>
+              <a:spcAft>
+                <a:spcPts val="0"/>
+              </a:spcAft>
+              <a:buSzPts val="1280"/>
               <a:buChar char="►"/>
             </a:pPr>
             <a:r>
-              <a:rPr lang="en-US"/>
-              <a:t>不想用 swap（教學最乾淨）：把兩個設成一樣。</a:t>
+              <a:rPr lang="en-US" sz="1600">
+                <a:solidFill>
+                  <a:srgbClr val="3F3F3F"/>
+                </a:solidFill>
+                <a:latin typeface="Trebuchet MS"/>
+                <a:ea typeface="Trebuchet MS"/>
+                <a:cs typeface="Trebuchet MS"/>
+                <a:sym typeface="Trebuchet MS"/>
+              </a:rPr>
+              <a:t>透過 docker inspect 《容器名稱》 --format '｛｛.HostConfig.MemorySwap｝｝' 來檢查容器的記憶體與交換空間設定，以便進一步調整。</a:t>
             </a:r>
-            <a:endParaRPr/>
+            <a:endParaRPr sz="1600">
+              <a:solidFill>
+                <a:srgbClr val="3F3F3F"/>
+              </a:solidFill>
+              <a:latin typeface="Trebuchet MS"/>
+              <a:ea typeface="Trebuchet MS"/>
+              <a:cs typeface="Trebuchet MS"/>
+              <a:sym typeface="Trebuchet MS"/>
+            </a:endParaRPr>
           </a:p>
         </p:txBody>
       </p:sp>
@@ -29740,7 +29484,7 @@
             </a:pPr>
             <a:r>
               <a:rPr lang="en-US"/>
-              <a:t> docker update</a:t>
+              <a:t>docker run --restart=always</a:t>
             </a:r>
             <a:endParaRPr/>
           </a:p>
@@ -29773,17 +29517,44 @@
           </a:bodyPr>
           <a:lstStyle/>
           <a:p>
-            <a:pPr indent="0" lvl="1" marL="457200" rtl="0" algn="l">
-              <a:lnSpc>
-                <a:spcPct val="100000"/>
-              </a:lnSpc>
-              <a:spcBef>
-                <a:spcPts val="0"/>
-              </a:spcBef>
-              <a:spcAft>
-                <a:spcPts val="0"/>
-              </a:spcAft>
-              <a:buSzPts val="1280"/>
+            <a:pPr indent="-342900" lvl="0" marL="342900" rtl="0" algn="l">
+              <a:lnSpc>
+                <a:spcPct val="100000"/>
+              </a:lnSpc>
+              <a:spcBef>
+                <a:spcPts val="0"/>
+              </a:spcBef>
+              <a:spcAft>
+                <a:spcPts val="0"/>
+              </a:spcAft>
+              <a:buSzPts val="1440"/>
+              <a:buChar char="►"/>
+            </a:pPr>
+            <a:r>
+              <a:rPr lang="en-US"/>
+              <a:t>只要容器停止後，如果再一開始docker run有預先加上這個參數</a:t>
+            </a:r>
+            <a:br>
+              <a:rPr lang="en-US"/>
+            </a:br>
+            <a:r>
+              <a:rPr lang="en-US"/>
+              <a:t>就會每次自動啟動</a:t>
+            </a:r>
+            <a:endParaRPr/>
+          </a:p>
+          <a:p>
+            <a:pPr indent="-251460" lvl="0" marL="342900" rtl="0" algn="l">
+              <a:lnSpc>
+                <a:spcPct val="100000"/>
+              </a:lnSpc>
+              <a:spcBef>
+                <a:spcPts val="1000"/>
+              </a:spcBef>
+              <a:spcAft>
+                <a:spcPts val="0"/>
+              </a:spcAft>
+              <a:buSzPts val="1440"/>
               <a:buNone/>
             </a:pPr>
             <a:r>
@@ -29806,62 +29577,10 @@
               <a:buChar char="►"/>
             </a:pPr>
             <a:r>
-              <a:rPr lang="en-US" sz="1800">
-                <a:solidFill>
-                  <a:srgbClr val="3F3F3F"/>
-                </a:solidFill>
-                <a:latin typeface="Trebuchet MS"/>
-                <a:ea typeface="Trebuchet MS"/>
-                <a:cs typeface="Trebuchet MS"/>
-                <a:sym typeface="Trebuchet MS"/>
-              </a:rPr>
-              <a:t>使用 docker inspect</a:t>
+              <a:rPr lang="en-US"/>
+              <a:t>請學生實際演練，將容器加上這個參數，接著測試記憶體爆炸的步驟</a:t>
             </a:r>
-            <a:endParaRPr sz="1800">
-              <a:solidFill>
-                <a:srgbClr val="3F3F3F"/>
-              </a:solidFill>
-              <a:latin typeface="Trebuchet MS"/>
-              <a:ea typeface="Trebuchet MS"/>
-              <a:cs typeface="Trebuchet MS"/>
-              <a:sym typeface="Trebuchet MS"/>
-            </a:endParaRPr>
-          </a:p>
-          <a:p>
-            <a:pPr indent="-285750" lvl="1" marL="742950" rtl="0" algn="l">
-              <a:lnSpc>
-                <a:spcPct val="100000"/>
-              </a:lnSpc>
-              <a:spcBef>
-                <a:spcPts val="1000"/>
-              </a:spcBef>
-              <a:spcAft>
-                <a:spcPts val="0"/>
-              </a:spcAft>
-              <a:buSzPts val="1280"/>
-              <a:buChar char="►"/>
-            </a:pPr>
-            <a:r>
-              <a:rPr lang="en-US" sz="1600">
-                <a:solidFill>
-                  <a:srgbClr val="3F3F3F"/>
-                </a:solidFill>
-                <a:latin typeface="Trebuchet MS"/>
-                <a:ea typeface="Trebuchet MS"/>
-                <a:cs typeface="Trebuchet MS"/>
-                <a:sym typeface="Trebuchet MS"/>
-              </a:rPr>
-              <a:t>透過 docker inspect 《容器名稱》 --format '｛｛.HostConfig.MemorySwap｝｝' 來檢查容器的記憶體與交換空間設定，以便進一步調整。</a:t>
-            </a:r>
-            <a:endParaRPr sz="1600">
-              <a:solidFill>
-                <a:srgbClr val="3F3F3F"/>
-              </a:solidFill>
-              <a:latin typeface="Trebuchet MS"/>
-              <a:ea typeface="Trebuchet MS"/>
-              <a:cs typeface="Trebuchet MS"/>
-              <a:sym typeface="Trebuchet MS"/>
-            </a:endParaRPr>
+            <a:endParaRPr/>
           </a:p>
         </p:txBody>
       </p:sp>
@@ -29935,10 +29654,13 @@
               <a:buNone/>
             </a:pPr>
             <a:r>
-              <a:rPr lang="en-US" sz="3600"/>
-              <a:t> --memory-swap 是什麼？</a:t>
+              <a:rPr lang="en-US"/>
+              <a:t>休息一下</a:t>
             </a:r>
-            <a:endParaRPr sz="3600"/>
+            <a:br>
+              <a:rPr lang="en-US"/>
+            </a:br>
+            <a:endParaRPr/>
           </a:p>
         </p:txBody>
       </p:sp>
@@ -29983,206 +29705,29 @@
               <a:buChar char="►"/>
             </a:pPr>
             <a:r>
-              <a:rPr lang="en-US" sz="1800">
-                <a:solidFill>
-                  <a:srgbClr val="3F3F3F"/>
-                </a:solidFill>
-                <a:latin typeface="Trebuchet MS"/>
-                <a:ea typeface="Trebuchet MS"/>
-                <a:cs typeface="Trebuchet MS"/>
-                <a:sym typeface="Trebuchet MS"/>
-              </a:rPr>
-              <a:t>理解 Swap Space（交換空間）</a:t>
+              <a:rPr lang="en-US"/>
+              <a:t>學員提問</a:t>
             </a:r>
-            <a:endParaRPr sz="1800">
-              <a:solidFill>
-                <a:srgbClr val="3F3F3F"/>
-              </a:solidFill>
-              <a:latin typeface="Trebuchet MS"/>
-              <a:ea typeface="Trebuchet MS"/>
-              <a:cs typeface="Trebuchet MS"/>
-              <a:sym typeface="Trebuchet MS"/>
-            </a:endParaRPr>
+            <a:endParaRPr/>
           </a:p>
           <a:p>
-            <a:pPr indent="-285750" lvl="1" marL="742950" rtl="0" algn="l">
-              <a:lnSpc>
-                <a:spcPct val="100000"/>
-              </a:lnSpc>
-              <a:spcBef>
-                <a:spcPts val="1000"/>
-              </a:spcBef>
-              <a:spcAft>
-                <a:spcPts val="0"/>
-              </a:spcAft>
-              <a:buSzPts val="1280"/>
-              <a:buChar char="►"/>
+            <a:pPr indent="-251460" lvl="0" marL="342900" rtl="0" algn="l">
+              <a:lnSpc>
+                <a:spcPct val="100000"/>
+              </a:lnSpc>
+              <a:spcBef>
+                <a:spcPts val="1000"/>
+              </a:spcBef>
+              <a:spcAft>
+                <a:spcPts val="0"/>
+              </a:spcAft>
+              <a:buSzPts val="1440"/>
+              <a:buNone/>
             </a:pPr>
             <a:r>
-              <a:rPr lang="en-US" sz="1600">
-                <a:solidFill>
-                  <a:srgbClr val="3F3F3F"/>
-                </a:solidFill>
-                <a:latin typeface="Trebuchet MS"/>
-                <a:ea typeface="Trebuchet MS"/>
-                <a:cs typeface="Trebuchet MS"/>
-                <a:sym typeface="Trebuchet MS"/>
-              </a:rPr>
-              <a:t>Swap 是操作系統在硬碟上劃出的一段空間，當 RAM 不夠時，系統會將不常用的資料移到此區域，這樣可以釋放實體記憶體來供需要的程序使用。</a:t>
+              <a:t/>
             </a:r>
-            <a:endParaRPr sz="1600">
-              <a:solidFill>
-                <a:srgbClr val="3F3F3F"/>
-              </a:solidFill>
-              <a:latin typeface="Trebuchet MS"/>
-              <a:ea typeface="Trebuchet MS"/>
-              <a:cs typeface="Trebuchet MS"/>
-              <a:sym typeface="Trebuchet MS"/>
-            </a:endParaRPr>
-          </a:p>
-          <a:p>
-            <a:pPr indent="-342900" lvl="0" marL="342900" rtl="0" algn="l">
-              <a:lnSpc>
-                <a:spcPct val="100000"/>
-              </a:lnSpc>
-              <a:spcBef>
-                <a:spcPts val="1000"/>
-              </a:spcBef>
-              <a:spcAft>
-                <a:spcPts val="0"/>
-              </a:spcAft>
-              <a:buSzPts val="1440"/>
-              <a:buChar char="►"/>
-            </a:pPr>
-            <a:r>
-              <a:rPr lang="en-US" sz="1800">
-                <a:solidFill>
-                  <a:srgbClr val="3F3F3F"/>
-                </a:solidFill>
-                <a:latin typeface="Trebuchet MS"/>
-                <a:ea typeface="Trebuchet MS"/>
-                <a:cs typeface="Trebuchet MS"/>
-                <a:sym typeface="Trebuchet MS"/>
-              </a:rPr>
-              <a:t>Swap 的限制</a:t>
-            </a:r>
-            <a:endParaRPr sz="1800">
-              <a:solidFill>
-                <a:srgbClr val="3F3F3F"/>
-              </a:solidFill>
-              <a:latin typeface="Trebuchet MS"/>
-              <a:ea typeface="Trebuchet MS"/>
-              <a:cs typeface="Trebuchet MS"/>
-              <a:sym typeface="Trebuchet MS"/>
-            </a:endParaRPr>
-          </a:p>
-          <a:p>
-            <a:pPr indent="-285750" lvl="1" marL="742950" rtl="0" algn="l">
-              <a:lnSpc>
-                <a:spcPct val="100000"/>
-              </a:lnSpc>
-              <a:spcBef>
-                <a:spcPts val="1000"/>
-              </a:spcBef>
-              <a:spcAft>
-                <a:spcPts val="0"/>
-              </a:spcAft>
-              <a:buSzPts val="1280"/>
-              <a:buChar char="►"/>
-            </a:pPr>
-            <a:r>
-              <a:rPr lang="en-US" sz="1600">
-                <a:solidFill>
-                  <a:srgbClr val="3F3F3F"/>
-                </a:solidFill>
-                <a:latin typeface="Trebuchet MS"/>
-                <a:ea typeface="Trebuchet MS"/>
-                <a:cs typeface="Trebuchet MS"/>
-                <a:sym typeface="Trebuchet MS"/>
-              </a:rPr>
-              <a:t>在 Docker 中，--memory-swap 定義了記憶體和 Swap 空間的總上限，若設定相同則禁用 swap。</a:t>
-            </a:r>
-            <a:endParaRPr sz="1600">
-              <a:solidFill>
-                <a:srgbClr val="3F3F3F"/>
-              </a:solidFill>
-              <a:latin typeface="Trebuchet MS"/>
-              <a:ea typeface="Trebuchet MS"/>
-              <a:cs typeface="Trebuchet MS"/>
-              <a:sym typeface="Trebuchet MS"/>
-            </a:endParaRPr>
-          </a:p>
-          <a:p>
-            <a:pPr indent="-342900" lvl="0" marL="342900" rtl="0" algn="l">
-              <a:lnSpc>
-                <a:spcPct val="100000"/>
-              </a:lnSpc>
-              <a:spcBef>
-                <a:spcPts val="1000"/>
-              </a:spcBef>
-              <a:spcAft>
-                <a:spcPts val="0"/>
-              </a:spcAft>
-              <a:buSzPts val="1440"/>
-              <a:buChar char="►"/>
-            </a:pPr>
-            <a:r>
-              <a:rPr lang="en-US" sz="1800">
-                <a:solidFill>
-                  <a:srgbClr val="3F3F3F"/>
-                </a:solidFill>
-                <a:latin typeface="Trebuchet MS"/>
-                <a:ea typeface="Trebuchet MS"/>
-                <a:cs typeface="Trebuchet MS"/>
-                <a:sym typeface="Trebuchet MS"/>
-              </a:rPr>
-              <a:t>效能影響</a:t>
-            </a:r>
-            <a:endParaRPr sz="1800">
-              <a:solidFill>
-                <a:srgbClr val="3F3F3F"/>
-              </a:solidFill>
-              <a:latin typeface="Trebuchet MS"/>
-              <a:ea typeface="Trebuchet MS"/>
-              <a:cs typeface="Trebuchet MS"/>
-              <a:sym typeface="Trebuchet MS"/>
-            </a:endParaRPr>
-          </a:p>
-          <a:p>
-            <a:pPr indent="-285750" lvl="1" marL="742950" rtl="0" algn="l">
-              <a:lnSpc>
-                <a:spcPct val="100000"/>
-              </a:lnSpc>
-              <a:spcBef>
-                <a:spcPts val="1000"/>
-              </a:spcBef>
-              <a:spcAft>
-                <a:spcPts val="0"/>
-              </a:spcAft>
-              <a:buSzPts val="1280"/>
-              <a:buChar char="►"/>
-            </a:pPr>
-            <a:r>
-              <a:rPr lang="en-US" sz="1600">
-                <a:solidFill>
-                  <a:srgbClr val="3F3F3F"/>
-                </a:solidFill>
-                <a:latin typeface="Trebuchet MS"/>
-                <a:ea typeface="Trebuchet MS"/>
-                <a:cs typeface="Trebuchet MS"/>
-                <a:sym typeface="Trebuchet MS"/>
-              </a:rPr>
-              <a:t>雖然 swap 能增加可用記憶體，但由於其速度較慢，使用 swap 會影響容器的性能，因此應謹慎使用。</a:t>
-            </a:r>
-            <a:endParaRPr sz="1600">
-              <a:solidFill>
-                <a:srgbClr val="3F3F3F"/>
-              </a:solidFill>
-              <a:latin typeface="Trebuchet MS"/>
-              <a:ea typeface="Trebuchet MS"/>
-              <a:cs typeface="Trebuchet MS"/>
-              <a:sym typeface="Trebuchet MS"/>
-            </a:endParaRPr>
+            <a:endParaRPr/>
           </a:p>
         </p:txBody>
       </p:sp>
@@ -30256,10 +29801,10 @@
               <a:buNone/>
             </a:pPr>
             <a:r>
-              <a:rPr lang="en-US" sz="3600"/>
-              <a:t> --memory-swap 是什麼？</a:t>
+              <a:rPr lang="en-US"/>
+              <a:t>docker logs</a:t>
             </a:r>
-            <a:endParaRPr sz="3600"/>
+            <a:endParaRPr/>
           </a:p>
         </p:txBody>
       </p:sp>
@@ -30273,8 +29818,8 @@
         </p:nvSpPr>
         <p:spPr>
           <a:xfrm>
-            <a:off x="677334" y="2160589"/>
-            <a:ext cx="8596668" cy="3880773"/>
+            <a:off x="677334" y="1530037"/>
+            <a:ext cx="9453494" cy="4511326"/>
           </a:xfrm>
           <a:prstGeom prst="rect">
             <a:avLst/>
@@ -30305,7 +29850,111 @@
             </a:pPr>
             <a:r>
               <a:rPr lang="en-US"/>
-              <a:t>你可以想成「RAM 是主記憶體」，「Swap 是暫時借硬碟空間來當記憶體」。</a:t>
+              <a:t>想像你有一個日記本,記錄著你每天做了什麼事。Docker logs 就像是容器的日記本</a:t>
+            </a:r>
+            <a:endParaRPr/>
+          </a:p>
+          <a:p>
+            <a:pPr indent="-342900" lvl="0" marL="342900" rtl="0" algn="l">
+              <a:lnSpc>
+                <a:spcPct val="100000"/>
+              </a:lnSpc>
+              <a:spcBef>
+                <a:spcPts val="1000"/>
+              </a:spcBef>
+              <a:spcAft>
+                <a:spcPts val="0"/>
+              </a:spcAft>
+              <a:buSzPts val="1440"/>
+              <a:buChar char="►"/>
+            </a:pPr>
+            <a:r>
+              <a:rPr b="1" lang="en-US"/>
+              <a:t>為什麼需要它?</a:t>
+            </a:r>
+            <a:r>
+              <a:rPr lang="en-US"/>
+              <a:t> 當你的程式出問題時,你可以看看「日記」裡寫了什麼,找出哪裡出錯了。</a:t>
+            </a:r>
+            <a:endParaRPr/>
+          </a:p>
+          <a:p>
+            <a:pPr indent="-342900" lvl="0" marL="342900" rtl="0" algn="l">
+              <a:lnSpc>
+                <a:spcPct val="100000"/>
+              </a:lnSpc>
+              <a:spcBef>
+                <a:spcPts val="1000"/>
+              </a:spcBef>
+              <a:spcAft>
+                <a:spcPts val="0"/>
+              </a:spcAft>
+              <a:buSzPts val="1440"/>
+              <a:buChar char="►"/>
+            </a:pPr>
+            <a:r>
+              <a:rPr b="1" lang="en-US"/>
+              <a:t>下載log產生器的image </a:t>
+            </a:r>
+            <a:endParaRPr b="1"/>
+          </a:p>
+          <a:p>
+            <a:pPr indent="-342900" lvl="0" marL="342900" rtl="0" algn="l">
+              <a:lnSpc>
+                <a:spcPct val="100000"/>
+              </a:lnSpc>
+              <a:spcBef>
+                <a:spcPts val="1000"/>
+              </a:spcBef>
+              <a:spcAft>
+                <a:spcPts val="0"/>
+              </a:spcAft>
+              <a:buSzPts val="1440"/>
+              <a:buChar char="►"/>
+            </a:pPr>
+            <a:r>
+              <a:rPr b="1" lang="en-US"/>
+              <a:t>https://hub.docker.com/r/vsn80395/logtest </a:t>
+            </a:r>
+            <a:endParaRPr b="1"/>
+          </a:p>
+          <a:p>
+            <a:pPr indent="-342900" lvl="0" marL="342900" rtl="0" algn="l">
+              <a:lnSpc>
+                <a:spcPct val="100000"/>
+              </a:lnSpc>
+              <a:spcBef>
+                <a:spcPts val="1000"/>
+              </a:spcBef>
+              <a:spcAft>
+                <a:spcPts val="0"/>
+              </a:spcAft>
+              <a:buSzPts val="1440"/>
+              <a:buChar char="►"/>
+            </a:pPr>
+            <a:r>
+              <a:rPr b="1" lang="en-US"/>
+              <a:t>基本用法:</a:t>
+            </a:r>
+            <a:endParaRPr b="1"/>
+          </a:p>
+          <a:p>
+            <a:pPr indent="0" lvl="0" marL="0" rtl="0" algn="l">
+              <a:lnSpc>
+                <a:spcPct val="100000"/>
+              </a:lnSpc>
+              <a:spcBef>
+                <a:spcPts val="1000"/>
+              </a:spcBef>
+              <a:spcAft>
+                <a:spcPts val="0"/>
+              </a:spcAft>
+              <a:buSzPts val="1440"/>
+              <a:buNone/>
+            </a:pPr>
+            <a:r>
+              <a:rPr lang="en-US"/>
+              <a:t>     docker logs 容器名稱</a:t>
             </a:r>
             <a:endParaRPr/>
           </a:p>
@@ -30329,7 +29978,7 @@
             <a:endParaRPr/>
           </a:p>
           <a:p>
-            <a:pPr indent="-342900" lvl="0" marL="342900" rtl="0" algn="l">
+            <a:pPr indent="0" lvl="0" marL="0" rtl="0" algn="l">
               <a:lnSpc>
                 <a:spcPct val="100000"/>
               </a:lnSpc>
@@ -30340,16 +29989,15 @@
                 <a:spcPts val="0"/>
               </a:spcAft>
               <a:buSzPts val="1440"/>
-              <a:buChar char="►"/>
+              <a:buNone/>
             </a:pPr>
             <a:r>
-              <a:rPr lang="en-US"/>
-              <a:t>類比	                                    意思</a:t>
+              <a:t/>
             </a:r>
             <a:endParaRPr/>
           </a:p>
           <a:p>
-            <a:pPr indent="-342900" lvl="0" marL="342900" rtl="0" algn="l">
+            <a:pPr indent="-251460" lvl="0" marL="342900" rtl="0" algn="l">
               <a:lnSpc>
                 <a:spcPct val="100000"/>
               </a:lnSpc>
@@ -30360,16 +30008,15 @@
                 <a:spcPts val="0"/>
               </a:spcAft>
               <a:buSzPts val="1440"/>
-              <a:buChar char="►"/>
+              <a:buNone/>
             </a:pPr>
             <a:r>
-              <a:rPr lang="en-US"/>
-              <a:t>--memory	                              給容器的「實體 RAM 上限」。</a:t>
+              <a:t/>
             </a:r>
             <a:endParaRPr/>
           </a:p>
           <a:p>
-            <a:pPr indent="-342900" lvl="0" marL="342900" rtl="0" algn="l">
+            <a:pPr indent="-251460" lvl="0" marL="342900" rtl="0" algn="l">
               <a:lnSpc>
                 <a:spcPct val="100000"/>
               </a:lnSpc>
@@ -30380,31 +30027,10 @@
                 <a:spcPts val="0"/>
               </a:spcAft>
               <a:buSzPts val="1440"/>
-              <a:buChar char="►"/>
+              <a:buNone/>
             </a:pPr>
             <a:r>
-              <a:rPr lang="en-US"/>
-              <a:t>--memory-swap	               「RAM + Swap」的總上限。</a:t>
-            </a:r>
-            <a:endParaRPr/>
-          </a:p>
-          <a:p>
-            <a:pPr indent="-342900" lvl="0" marL="342900" rtl="0" algn="l">
-              <a:lnSpc>
-                <a:spcPct val="100000"/>
-              </a:lnSpc>
-              <a:spcBef>
-                <a:spcPts val="1000"/>
-              </a:spcBef>
-              <a:spcAft>
-                <a:spcPts val="0"/>
-              </a:spcAft>
-              <a:buSzPts val="1440"/>
-              <a:buChar char="►"/>
-            </a:pPr>
-            <a:r>
-              <a:rPr lang="en-US"/>
-              <a:t>--memory-swap - --memory	   就是容器能「借用硬碟空間」的量。</a:t>
+              <a:t/>
             </a:r>
             <a:endParaRPr/>
           </a:p>
@@ -30481,7 +30107,7 @@
             </a:pPr>
             <a:r>
               <a:rPr lang="en-US"/>
-              <a:t>docker run --restart=always</a:t>
+              <a:t>docker logs(2)</a:t>
             </a:r>
             <a:endParaRPr/>
           </a:p>
@@ -30497,8 +30123,8 @@
         </p:nvSpPr>
         <p:spPr>
           <a:xfrm>
-            <a:off x="677334" y="2160589"/>
-            <a:ext cx="8596668" cy="3880773"/>
+            <a:off x="677333" y="1530036"/>
+            <a:ext cx="9771683" cy="5030561"/>
           </a:xfrm>
           <a:prstGeom prst="rect">
             <a:avLst/>
@@ -30510,7 +30136,7 @@
         </p:spPr>
         <p:txBody>
           <a:bodyPr anchorCtr="0" anchor="t" bIns="45700" lIns="91425" spcFirstLastPara="1" rIns="91425" wrap="square" tIns="45700">
-            <a:normAutofit/>
+            <a:normAutofit fontScale="92500" lnSpcReduction="10000"/>
           </a:bodyPr>
           <a:lstStyle/>
           <a:p>
@@ -30524,38 +30150,52 @@
               <a:spcAft>
                 <a:spcPts val="0"/>
               </a:spcAft>
-              <a:buSzPts val="1440"/>
+              <a:buSzPct val="80000"/>
+              <a:buChar char="►"/>
+            </a:pPr>
+            <a:r>
+              <a:rPr b="1" lang="en-US"/>
+              <a:t>進階用法:</a:t>
+            </a:r>
+            <a:endParaRPr b="1"/>
+          </a:p>
+          <a:p>
+            <a:pPr indent="-342900" lvl="0" marL="342900" rtl="0" algn="l">
+              <a:lnSpc>
+                <a:spcPct val="100000"/>
+              </a:lnSpc>
+              <a:spcBef>
+                <a:spcPts val="1000"/>
+              </a:spcBef>
+              <a:spcAft>
+                <a:spcPts val="0"/>
+              </a:spcAft>
+              <a:buSzPct val="80000"/>
               <a:buChar char="►"/>
             </a:pPr>
             <a:r>
               <a:rPr lang="en-US"/>
-              <a:t>只要容器停止後，如果再一開始docker run有預先加上這個參數</a:t>
-            </a:r>
-            <a:br>
-              <a:rPr lang="en-US"/>
-            </a:br>
-            <a:r>
-              <a:rPr lang="en-US"/>
-              <a:t>就會每次自動啟動</a:t>
+              <a:t> 即時監看最新 100 行，之後持續跟</a:t>
             </a:r>
             <a:endParaRPr/>
           </a:p>
           <a:p>
-            <a:pPr indent="-251460" lvl="0" marL="342900" rtl="0" algn="l">
-              <a:lnSpc>
-                <a:spcPct val="100000"/>
-              </a:lnSpc>
-              <a:spcBef>
-                <a:spcPts val="1000"/>
-              </a:spcBef>
-              <a:spcAft>
-                <a:spcPts val="0"/>
-              </a:spcAft>
-              <a:buSzPts val="1440"/>
+            <a:pPr indent="0" lvl="0" marL="0" rtl="0" algn="l">
+              <a:lnSpc>
+                <a:spcPct val="100000"/>
+              </a:lnSpc>
+              <a:spcBef>
+                <a:spcPts val="1000"/>
+              </a:spcBef>
+              <a:spcAft>
+                <a:spcPts val="0"/>
+              </a:spcAft>
+              <a:buSzPct val="80000"/>
               <a:buNone/>
             </a:pPr>
             <a:r>
-              <a:t/>
+              <a:rPr lang="en-US"/>
+              <a:t>       docker logs -f --tail 100 myapp</a:t>
             </a:r>
             <a:endParaRPr/>
           </a:p>
@@ -30570,12 +30210,231 @@
               <a:spcAft>
                 <a:spcPts val="0"/>
               </a:spcAft>
-              <a:buSzPts val="1440"/>
+              <a:buSzPct val="80000"/>
               <a:buChar char="►"/>
             </a:pPr>
             <a:r>
               <a:rPr lang="en-US"/>
-              <a:t>請學生實際演練，將容器加上這個參數，接著測試記憶體爆炸的步驟</a:t>
+              <a:t>看最近 10 分鐘內</a:t>
+            </a:r>
+            <a:endParaRPr/>
+          </a:p>
+          <a:p>
+            <a:pPr indent="0" lvl="0" marL="0" rtl="0" algn="l">
+              <a:lnSpc>
+                <a:spcPct val="100000"/>
+              </a:lnSpc>
+              <a:spcBef>
+                <a:spcPts val="1000"/>
+              </a:spcBef>
+              <a:spcAft>
+                <a:spcPts val="0"/>
+              </a:spcAft>
+              <a:buSzPct val="80000"/>
+              <a:buNone/>
+            </a:pPr>
+            <a:r>
+              <a:rPr lang="en-US"/>
+              <a:t>	docker logs --since 10m myapp</a:t>
+            </a:r>
+            <a:endParaRPr/>
+          </a:p>
+          <a:p>
+            <a:pPr indent="-342900" lvl="0" marL="342900" rtl="0" algn="l">
+              <a:lnSpc>
+                <a:spcPct val="100000"/>
+              </a:lnSpc>
+              <a:spcBef>
+                <a:spcPts val="1000"/>
+              </a:spcBef>
+              <a:spcAft>
+                <a:spcPts val="0"/>
+              </a:spcAft>
+              <a:buSzPct val="80000"/>
+              <a:buChar char="►"/>
+            </a:pPr>
+            <a:r>
+              <a:rPr lang="en-US"/>
+              <a:t>指定時間區間（10:00 ~ 11:00）</a:t>
+            </a:r>
+            <a:endParaRPr/>
+          </a:p>
+          <a:p>
+            <a:pPr indent="0" lvl="0" marL="0" rtl="0" algn="l">
+              <a:lnSpc>
+                <a:spcPct val="100000"/>
+              </a:lnSpc>
+              <a:spcBef>
+                <a:spcPts val="1000"/>
+              </a:spcBef>
+              <a:spcAft>
+                <a:spcPts val="0"/>
+              </a:spcAft>
+              <a:buSzPct val="80000"/>
+              <a:buNone/>
+            </a:pPr>
+            <a:r>
+              <a:rPr lang="en-US"/>
+              <a:t>	docker logs --since "2025-10-30T10:00:00+08:00" \</a:t>
+            </a:r>
+            <a:endParaRPr/>
+          </a:p>
+          <a:p>
+            <a:pPr indent="0" lvl="0" marL="0" rtl="0" algn="l">
+              <a:lnSpc>
+                <a:spcPct val="100000"/>
+              </a:lnSpc>
+              <a:spcBef>
+                <a:spcPts val="1000"/>
+              </a:spcBef>
+              <a:spcAft>
+                <a:spcPts val="0"/>
+              </a:spcAft>
+              <a:buSzPct val="80000"/>
+              <a:buNone/>
+            </a:pPr>
+            <a:r>
+              <a:rPr lang="en-US"/>
+              <a:t>                         --until "2025-10-30T11:00:00+08:00" myapp</a:t>
+            </a:r>
+            <a:endParaRPr/>
+          </a:p>
+          <a:p>
+            <a:pPr indent="-342900" lvl="0" marL="342900" rtl="0" algn="l">
+              <a:lnSpc>
+                <a:spcPct val="100000"/>
+              </a:lnSpc>
+              <a:spcBef>
+                <a:spcPts val="1000"/>
+              </a:spcBef>
+              <a:spcAft>
+                <a:spcPts val="0"/>
+              </a:spcAft>
+              <a:buSzPct val="80000"/>
+              <a:buChar char="►"/>
+            </a:pPr>
+            <a:r>
+              <a:rPr lang="en-US"/>
+              <a:t>帶時間戳記</a:t>
+            </a:r>
+            <a:endParaRPr/>
+          </a:p>
+          <a:p>
+            <a:pPr indent="0" lvl="0" marL="0" rtl="0" algn="l">
+              <a:lnSpc>
+                <a:spcPct val="100000"/>
+              </a:lnSpc>
+              <a:spcBef>
+                <a:spcPts val="1000"/>
+              </a:spcBef>
+              <a:spcAft>
+                <a:spcPts val="0"/>
+              </a:spcAft>
+              <a:buSzPct val="80000"/>
+              <a:buNone/>
+            </a:pPr>
+            <a:r>
+              <a:rPr lang="en-US"/>
+              <a:t>	docker logs -t myapp</a:t>
+            </a:r>
+            <a:endParaRPr/>
+          </a:p>
+          <a:p>
+            <a:pPr indent="-342900" lvl="0" marL="342900" rtl="0" algn="l">
+              <a:lnSpc>
+                <a:spcPct val="100000"/>
+              </a:lnSpc>
+              <a:spcBef>
+                <a:spcPts val="1000"/>
+              </a:spcBef>
+              <a:spcAft>
+                <a:spcPts val="0"/>
+              </a:spcAft>
+              <a:buSzPct val="80000"/>
+              <a:buChar char="►"/>
+            </a:pPr>
+            <a:r>
+              <a:rPr lang="en-US"/>
+              <a:t>只看最後 50 行</a:t>
+            </a:r>
+            <a:endParaRPr/>
+          </a:p>
+          <a:p>
+            <a:pPr indent="0" lvl="0" marL="0" rtl="0" algn="l">
+              <a:lnSpc>
+                <a:spcPct val="100000"/>
+              </a:lnSpc>
+              <a:spcBef>
+                <a:spcPts val="1000"/>
+              </a:spcBef>
+              <a:spcAft>
+                <a:spcPts val="0"/>
+              </a:spcAft>
+              <a:buSzPct val="80000"/>
+              <a:buNone/>
+            </a:pPr>
+            <a:r>
+              <a:rPr lang="en-US"/>
+              <a:t>	docker logs --tail 50 myapp</a:t>
+            </a:r>
+            <a:endParaRPr/>
+          </a:p>
+          <a:p>
+            <a:pPr indent="-342900" lvl="0" marL="342900" rtl="0" algn="l">
+              <a:lnSpc>
+                <a:spcPct val="100000"/>
+              </a:lnSpc>
+              <a:spcBef>
+                <a:spcPts val="1000"/>
+              </a:spcBef>
+              <a:spcAft>
+                <a:spcPts val="0"/>
+              </a:spcAft>
+              <a:buSzPct val="80000"/>
+              <a:buChar char="►"/>
+            </a:pPr>
+            <a:r>
+              <a:rPr lang="en-US"/>
+              <a:t>請學生實際演練，各個參數差別</a:t>
+            </a:r>
+            <a:endParaRPr/>
+          </a:p>
+          <a:p>
+            <a:pPr indent="-342900" lvl="0" marL="342900" rtl="0" algn="l">
+              <a:lnSpc>
+                <a:spcPct val="100000"/>
+              </a:lnSpc>
+              <a:spcBef>
+                <a:spcPts val="1000"/>
+              </a:spcBef>
+              <a:spcAft>
+                <a:spcPts val="0"/>
+              </a:spcAft>
+              <a:buSzPct val="80000"/>
+              <a:buChar char="►"/>
+            </a:pPr>
+            <a:r>
+              <a:rPr lang="en-US"/>
+              <a:t>請學生操作memoryconfig 操作記憶體量 並且另外開一個cmd輸入docker logs來觀察</a:t>
+            </a:r>
+            <a:endParaRPr/>
+          </a:p>
+          <a:p>
+            <a:pPr indent="-258445" lvl="0" marL="342900" rtl="0" algn="l">
+              <a:lnSpc>
+                <a:spcPct val="100000"/>
+              </a:lnSpc>
+              <a:spcBef>
+                <a:spcPts val="1000"/>
+              </a:spcBef>
+              <a:spcAft>
+                <a:spcPts val="0"/>
+              </a:spcAft>
+              <a:buSzPct val="80000"/>
+              <a:buNone/>
+            </a:pPr>
+            <a:r>
+              <a:t/>
             </a:r>
             <a:endParaRPr/>
           </a:p>
@@ -30652,11 +30511,8 @@
             </a:pPr>
             <a:r>
               <a:rPr lang="en-US"/>
-              <a:t>休息一下</a:t>
+              <a:t>下載位置</a:t>
             </a:r>
-            <a:br>
-              <a:rPr lang="en-US"/>
-            </a:br>
             <a:endParaRPr/>
           </a:p>
         </p:txBody>
@@ -30702,154 +30558,10 @@
               <a:buChar char="►"/>
             </a:pPr>
             <a:r>
-              <a:rPr lang="en-US"/>
-              <a:t>學員提問</a:t>
+              <a:rPr b="1" lang="en-US"/>
+              <a:t>https://github.com/coolyuoo/CpuConfig 容器CPU控制原始檔</a:t>
             </a:r>
-            <a:endParaRPr/>
-          </a:p>
-          <a:p>
-            <a:pPr indent="-251460" lvl="0" marL="342900" rtl="0" algn="l">
-              <a:lnSpc>
-                <a:spcPct val="100000"/>
-              </a:lnSpc>
-              <a:spcBef>
-                <a:spcPts val="1000"/>
-              </a:spcBef>
-              <a:spcAft>
-                <a:spcPts val="0"/>
-              </a:spcAft>
-              <a:buSzPts val="1440"/>
-              <a:buNone/>
-            </a:pPr>
-            <a:r>
-              <a:t/>
-            </a:r>
-            <a:endParaRPr/>
-          </a:p>
-        </p:txBody>
-      </p:sp>
-    </p:spTree>
-  </p:cSld>
-  <p:clrMapOvr>
-    <a:masterClrMapping/>
-  </p:clrMapOvr>
-</p:sld>
-</file>
-
-<file path=ppt/slides/slide29.xml><?xml version="1.0" encoding="utf-8"?>
-<p:sld xmlns:a="http://schemas.openxmlformats.org/drawingml/2006/main" xmlns:r="http://schemas.openxmlformats.org/officeDocument/2006/relationships" xmlns:mc="http://schemas.openxmlformats.org/markup-compatibility/2006" xmlns:mv="urn:schemas-microsoft-com:mac:vml" xmlns:p="http://schemas.openxmlformats.org/presentationml/2006/main" xmlns:c="http://schemas.openxmlformats.org/drawingml/2006/chart" xmlns:dgm="http://schemas.openxmlformats.org/drawingml/2006/diagram" xmlns:o="urn:schemas-microsoft-com:office:office" xmlns:v="urn:schemas-microsoft-com:vml" xmlns:pvml="urn:schemas-microsoft-com:office:powerpoint" xmlns:com="http://schemas.openxmlformats.org/drawingml/2006/compatibility" xmlns:p14="http://schemas.microsoft.com/office/powerpoint/2010/main" xmlns:p15="http://schemas.microsoft.com/office/powerpoint/2012/main" xmlns:ahyp="http://schemas.microsoft.com/office/drawing/2018/hyperlinkcolor">
-  <p:cSld>
-    <p:spTree>
-      <p:nvGrpSpPr>
-        <p:cNvPr id="320" name="Shape 320"/>
-        <p:cNvGrpSpPr/>
-        <p:nvPr/>
-      </p:nvGrpSpPr>
-      <p:grpSpPr>
-        <a:xfrm>
-          <a:off x="0" y="0"/>
-          <a:ext cx="0" cy="0"/>
-          <a:chOff x="0" y="0"/>
-          <a:chExt cx="0" cy="0"/>
-        </a:xfrm>
-      </p:grpSpPr>
-      <p:sp>
-        <p:nvSpPr>
-          <p:cNvPr id="321" name="Google Shape;321;p46"/>
-          <p:cNvSpPr txBox="1"/>
-          <p:nvPr>
-            <p:ph type="title"/>
-          </p:nvPr>
-        </p:nvSpPr>
-        <p:spPr>
-          <a:xfrm>
-            <a:off x="677334" y="609600"/>
-            <a:ext cx="8596668" cy="1320800"/>
-          </a:xfrm>
-          <a:prstGeom prst="rect">
-            <a:avLst/>
-          </a:prstGeom>
-          <a:noFill/>
-          <a:ln>
-            <a:noFill/>
-          </a:ln>
-        </p:spPr>
-        <p:txBody>
-          <a:bodyPr anchorCtr="0" anchor="t" bIns="45700" lIns="91425" spcFirstLastPara="1" rIns="91425" wrap="square" tIns="45700">
-            <a:normAutofit/>
-          </a:bodyPr>
-          <a:lstStyle/>
-          <a:p>
-            <a:pPr indent="0" lvl="0" marL="0" rtl="0" algn="l">
-              <a:lnSpc>
-                <a:spcPct val="100000"/>
-              </a:lnSpc>
-              <a:spcBef>
-                <a:spcPts val="0"/>
-              </a:spcBef>
-              <a:spcAft>
-                <a:spcPts val="0"/>
-              </a:spcAft>
-              <a:buClr>
-                <a:schemeClr val="accent1"/>
-              </a:buClr>
-              <a:buSzPts val="3600"/>
-              <a:buFont typeface="Trebuchet MS"/>
-              <a:buNone/>
-            </a:pPr>
-            <a:r>
-              <a:rPr lang="en-US"/>
-              <a:t>docker logs</a:t>
-            </a:r>
-            <a:endParaRPr/>
-          </a:p>
-        </p:txBody>
-      </p:sp>
-      <p:sp>
-        <p:nvSpPr>
-          <p:cNvPr id="322" name="Google Shape;322;p46"/>
-          <p:cNvSpPr txBox="1"/>
-          <p:nvPr>
-            <p:ph idx="1" type="body"/>
-          </p:nvPr>
-        </p:nvSpPr>
-        <p:spPr>
-          <a:xfrm>
-            <a:off x="677334" y="1530037"/>
-            <a:ext cx="9453494" cy="4511326"/>
-          </a:xfrm>
-          <a:prstGeom prst="rect">
-            <a:avLst/>
-          </a:prstGeom>
-          <a:noFill/>
-          <a:ln>
-            <a:noFill/>
-          </a:ln>
-        </p:spPr>
-        <p:txBody>
-          <a:bodyPr anchorCtr="0" anchor="t" bIns="45700" lIns="91425" spcFirstLastPara="1" rIns="91425" wrap="square" tIns="45700">
-            <a:normAutofit/>
-          </a:bodyPr>
-          <a:lstStyle/>
-          <a:p>
-            <a:pPr indent="-342900" lvl="0" marL="342900" rtl="0" algn="l">
-              <a:lnSpc>
-                <a:spcPct val="100000"/>
-              </a:lnSpc>
-              <a:spcBef>
-                <a:spcPts val="0"/>
-              </a:spcBef>
-              <a:spcAft>
-                <a:spcPts val="0"/>
-              </a:spcAft>
-              <a:buSzPts val="1440"/>
-              <a:buChar char="►"/>
-            </a:pPr>
-            <a:r>
-              <a:rPr lang="en-US"/>
-              <a:t>想像你有一個日記本,記錄著你每天做了什麼事。Docker logs 就像是容器的日記本</a:t>
-            </a:r>
-            <a:endParaRPr/>
+            <a:endParaRPr b="1"/>
           </a:p>
           <a:p>
             <a:pPr indent="-342900" lvl="0" marL="342900" rtl="0" algn="l">
@@ -30867,13 +30579,9 @@
             </a:pPr>
             <a:r>
               <a:rPr b="1" lang="en-US"/>
-              <a:t>為什麼需要它?</a:t>
+              <a:t>https://hub.docker.com/r/vsn80395/cpuconfig 容器CPU控制IMAGE</a:t>
             </a:r>
-            <a:r>
-              <a:rPr lang="en-US"/>
-              <a:t> 當你的程式出問題時,你可以看看「日記」裡寫了什麼,找出哪裡出錯了。</a:t>
-            </a:r>
-            <a:endParaRPr/>
+            <a:endParaRPr b="1"/>
           </a:p>
           <a:p>
             <a:pPr indent="-342900" lvl="0" marL="342900" rtl="0" algn="l">
@@ -30891,7 +30599,7 @@
             </a:pPr>
             <a:r>
               <a:rPr b="1" lang="en-US"/>
-              <a:t>下載log產生器的image </a:t>
+              <a:t>https://github.com/coolyuoo/MemoryConfig 容器記憶體控制原始檔</a:t>
             </a:r>
             <a:endParaRPr b="1"/>
           </a:p>
@@ -30911,7 +30619,7 @@
             </a:pPr>
             <a:r>
               <a:rPr b="1" lang="en-US"/>
-              <a:t>https://hub.docker.com/r/vsn80395/logtest </a:t>
+              <a:t>https://hub.docker.com/r/vsn80395/memoryconfig 容器記憶體控制IMAGE</a:t>
             </a:r>
             <a:endParaRPr b="1"/>
           </a:p>
@@ -30931,7 +30639,26 @@
             </a:pPr>
             <a:r>
               <a:rPr b="1" lang="en-US"/>
-              <a:t>基本用法:</a:t>
+              <a:t>https://hub.docker.com/r/vsn80395/logtest LOG產生器IMAGE</a:t>
+            </a:r>
+            <a:endParaRPr b="1"/>
+          </a:p>
+          <a:p>
+            <a:pPr indent="-251460" lvl="0" marL="342900" rtl="0" algn="l">
+              <a:lnSpc>
+                <a:spcPct val="100000"/>
+              </a:lnSpc>
+              <a:spcBef>
+                <a:spcPts val="1000"/>
+              </a:spcBef>
+              <a:spcAft>
+                <a:spcPts val="0"/>
+              </a:spcAft>
+              <a:buSzPts val="1440"/>
+              <a:buNone/>
+            </a:pPr>
+            <a:r>
+              <a:t/>
             </a:r>
             <a:endParaRPr b="1"/>
           </a:p>
@@ -30950,10 +30677,9 @@
               <a:buNone/>
             </a:pPr>
             <a:r>
-              <a:rPr lang="en-US"/>
-              <a:t>     docker logs 容器名稱</a:t>
+              <a:t/>
             </a:r>
-            <a:endParaRPr/>
+            <a:endParaRPr b="1"/>
           </a:p>
           <a:p>
             <a:pPr indent="-251460" lvl="0" marL="342900" rtl="0" algn="l">
@@ -30972,64 +30698,7 @@
             <a:r>
               <a:t/>
             </a:r>
-            <a:endParaRPr/>
-          </a:p>
-          <a:p>
-            <a:pPr indent="0" lvl="0" marL="0" rtl="0" algn="l">
-              <a:lnSpc>
-                <a:spcPct val="100000"/>
-              </a:lnSpc>
-              <a:spcBef>
-                <a:spcPts val="1000"/>
-              </a:spcBef>
-              <a:spcAft>
-                <a:spcPts val="0"/>
-              </a:spcAft>
-              <a:buSzPts val="1440"/>
-              <a:buNone/>
-            </a:pPr>
-            <a:r>
-              <a:t/>
-            </a:r>
-            <a:endParaRPr/>
-          </a:p>
-          <a:p>
-            <a:pPr indent="-251460" lvl="0" marL="342900" rtl="0" algn="l">
-              <a:lnSpc>
-                <a:spcPct val="100000"/>
-              </a:lnSpc>
-              <a:spcBef>
-                <a:spcPts val="1000"/>
-              </a:spcBef>
-              <a:spcAft>
-                <a:spcPts val="0"/>
-              </a:spcAft>
-              <a:buSzPts val="1440"/>
-              <a:buNone/>
-            </a:pPr>
-            <a:r>
-              <a:t/>
-            </a:r>
-            <a:endParaRPr/>
-          </a:p>
-          <a:p>
-            <a:pPr indent="-251460" lvl="0" marL="342900" rtl="0" algn="l">
-              <a:lnSpc>
-                <a:spcPct val="100000"/>
-              </a:lnSpc>
-              <a:spcBef>
-                <a:spcPts val="1000"/>
-              </a:spcBef>
-              <a:spcAft>
-                <a:spcPts val="0"/>
-              </a:spcAft>
-              <a:buSzPts val="1440"/>
-              <a:buNone/>
-            </a:pPr>
-            <a:r>
-              <a:t/>
-            </a:r>
-            <a:endParaRPr/>
+            <a:endParaRPr b="1"/>
           </a:p>
         </p:txBody>
       </p:sp>
@@ -31275,672 +30944,6 @@
               <a:t>透過實作，學員將體會不同資源限制對容器行為的影響，並學會如何調整配置以達到最佳效能。</a:t>
             </a:r>
             <a:endParaRPr/>
-          </a:p>
-        </p:txBody>
-      </p:sp>
-    </p:spTree>
-  </p:cSld>
-  <p:clrMapOvr>
-    <a:masterClrMapping/>
-  </p:clrMapOvr>
-</p:sld>
-</file>
-
-<file path=ppt/slides/slide30.xml><?xml version="1.0" encoding="utf-8"?>
-<p:sld xmlns:a="http://schemas.openxmlformats.org/drawingml/2006/main" xmlns:r="http://schemas.openxmlformats.org/officeDocument/2006/relationships" xmlns:mc="http://schemas.openxmlformats.org/markup-compatibility/2006" xmlns:mv="urn:schemas-microsoft-com:mac:vml" xmlns:p="http://schemas.openxmlformats.org/presentationml/2006/main" xmlns:c="http://schemas.openxmlformats.org/drawingml/2006/chart" xmlns:dgm="http://schemas.openxmlformats.org/drawingml/2006/diagram" xmlns:o="urn:schemas-microsoft-com:office:office" xmlns:v="urn:schemas-microsoft-com:vml" xmlns:pvml="urn:schemas-microsoft-com:office:powerpoint" xmlns:com="http://schemas.openxmlformats.org/drawingml/2006/compatibility" xmlns:p14="http://schemas.microsoft.com/office/powerpoint/2010/main" xmlns:p15="http://schemas.microsoft.com/office/powerpoint/2012/main" xmlns:ahyp="http://schemas.microsoft.com/office/drawing/2018/hyperlinkcolor">
-  <p:cSld>
-    <p:spTree>
-      <p:nvGrpSpPr>
-        <p:cNvPr id="326" name="Shape 326"/>
-        <p:cNvGrpSpPr/>
-        <p:nvPr/>
-      </p:nvGrpSpPr>
-      <p:grpSpPr>
-        <a:xfrm>
-          <a:off x="0" y="0"/>
-          <a:ext cx="0" cy="0"/>
-          <a:chOff x="0" y="0"/>
-          <a:chExt cx="0" cy="0"/>
-        </a:xfrm>
-      </p:grpSpPr>
-      <p:sp>
-        <p:nvSpPr>
-          <p:cNvPr id="327" name="Google Shape;327;p47"/>
-          <p:cNvSpPr txBox="1"/>
-          <p:nvPr>
-            <p:ph type="title"/>
-          </p:nvPr>
-        </p:nvSpPr>
-        <p:spPr>
-          <a:xfrm>
-            <a:off x="677334" y="609600"/>
-            <a:ext cx="8596668" cy="1320800"/>
-          </a:xfrm>
-          <a:prstGeom prst="rect">
-            <a:avLst/>
-          </a:prstGeom>
-          <a:noFill/>
-          <a:ln>
-            <a:noFill/>
-          </a:ln>
-        </p:spPr>
-        <p:txBody>
-          <a:bodyPr anchorCtr="0" anchor="t" bIns="45700" lIns="91425" spcFirstLastPara="1" rIns="91425" wrap="square" tIns="45700">
-            <a:normAutofit/>
-          </a:bodyPr>
-          <a:lstStyle/>
-          <a:p>
-            <a:pPr indent="0" lvl="0" marL="0" rtl="0" algn="l">
-              <a:lnSpc>
-                <a:spcPct val="100000"/>
-              </a:lnSpc>
-              <a:spcBef>
-                <a:spcPts val="0"/>
-              </a:spcBef>
-              <a:spcAft>
-                <a:spcPts val="0"/>
-              </a:spcAft>
-              <a:buClr>
-                <a:schemeClr val="accent1"/>
-              </a:buClr>
-              <a:buSzPts val="3600"/>
-              <a:buFont typeface="Trebuchet MS"/>
-              <a:buNone/>
-            </a:pPr>
-            <a:r>
-              <a:rPr lang="en-US"/>
-              <a:t>docker logs(2)</a:t>
-            </a:r>
-            <a:endParaRPr/>
-          </a:p>
-        </p:txBody>
-      </p:sp>
-      <p:sp>
-        <p:nvSpPr>
-          <p:cNvPr id="328" name="Google Shape;328;p47"/>
-          <p:cNvSpPr txBox="1"/>
-          <p:nvPr>
-            <p:ph idx="1" type="body"/>
-          </p:nvPr>
-        </p:nvSpPr>
-        <p:spPr>
-          <a:xfrm>
-            <a:off x="677333" y="1530036"/>
-            <a:ext cx="9771683" cy="5030561"/>
-          </a:xfrm>
-          <a:prstGeom prst="rect">
-            <a:avLst/>
-          </a:prstGeom>
-          <a:noFill/>
-          <a:ln>
-            <a:noFill/>
-          </a:ln>
-        </p:spPr>
-        <p:txBody>
-          <a:bodyPr anchorCtr="0" anchor="t" bIns="45700" lIns="91425" spcFirstLastPara="1" rIns="91425" wrap="square" tIns="45700">
-            <a:normAutofit fontScale="92500" lnSpcReduction="10000"/>
-          </a:bodyPr>
-          <a:lstStyle/>
-          <a:p>
-            <a:pPr indent="-342900" lvl="0" marL="342900" rtl="0" algn="l">
-              <a:lnSpc>
-                <a:spcPct val="100000"/>
-              </a:lnSpc>
-              <a:spcBef>
-                <a:spcPts val="0"/>
-              </a:spcBef>
-              <a:spcAft>
-                <a:spcPts val="0"/>
-              </a:spcAft>
-              <a:buSzPct val="80000"/>
-              <a:buChar char="►"/>
-            </a:pPr>
-            <a:r>
-              <a:rPr b="1" lang="en-US"/>
-              <a:t>進階用法:</a:t>
-            </a:r>
-            <a:endParaRPr b="1"/>
-          </a:p>
-          <a:p>
-            <a:pPr indent="-342900" lvl="0" marL="342900" rtl="0" algn="l">
-              <a:lnSpc>
-                <a:spcPct val="100000"/>
-              </a:lnSpc>
-              <a:spcBef>
-                <a:spcPts val="1000"/>
-              </a:spcBef>
-              <a:spcAft>
-                <a:spcPts val="0"/>
-              </a:spcAft>
-              <a:buSzPct val="80000"/>
-              <a:buChar char="►"/>
-            </a:pPr>
-            <a:r>
-              <a:rPr lang="en-US"/>
-              <a:t> 即時監看最新 100 行，之後持續跟</a:t>
-            </a:r>
-            <a:endParaRPr/>
-          </a:p>
-          <a:p>
-            <a:pPr indent="0" lvl="0" marL="0" rtl="0" algn="l">
-              <a:lnSpc>
-                <a:spcPct val="100000"/>
-              </a:lnSpc>
-              <a:spcBef>
-                <a:spcPts val="1000"/>
-              </a:spcBef>
-              <a:spcAft>
-                <a:spcPts val="0"/>
-              </a:spcAft>
-              <a:buSzPct val="80000"/>
-              <a:buNone/>
-            </a:pPr>
-            <a:r>
-              <a:rPr lang="en-US"/>
-              <a:t>       docker logs -f --tail 100 myapp</a:t>
-            </a:r>
-            <a:endParaRPr/>
-          </a:p>
-          <a:p>
-            <a:pPr indent="-342900" lvl="0" marL="342900" rtl="0" algn="l">
-              <a:lnSpc>
-                <a:spcPct val="100000"/>
-              </a:lnSpc>
-              <a:spcBef>
-                <a:spcPts val="1000"/>
-              </a:spcBef>
-              <a:spcAft>
-                <a:spcPts val="0"/>
-              </a:spcAft>
-              <a:buSzPct val="80000"/>
-              <a:buChar char="►"/>
-            </a:pPr>
-            <a:r>
-              <a:rPr lang="en-US"/>
-              <a:t>看最近 10 分鐘內</a:t>
-            </a:r>
-            <a:endParaRPr/>
-          </a:p>
-          <a:p>
-            <a:pPr indent="0" lvl="0" marL="0" rtl="0" algn="l">
-              <a:lnSpc>
-                <a:spcPct val="100000"/>
-              </a:lnSpc>
-              <a:spcBef>
-                <a:spcPts val="1000"/>
-              </a:spcBef>
-              <a:spcAft>
-                <a:spcPts val="0"/>
-              </a:spcAft>
-              <a:buSzPct val="80000"/>
-              <a:buNone/>
-            </a:pPr>
-            <a:r>
-              <a:rPr lang="en-US"/>
-              <a:t>	docker logs --since 10m myapp</a:t>
-            </a:r>
-            <a:endParaRPr/>
-          </a:p>
-          <a:p>
-            <a:pPr indent="-342900" lvl="0" marL="342900" rtl="0" algn="l">
-              <a:lnSpc>
-                <a:spcPct val="100000"/>
-              </a:lnSpc>
-              <a:spcBef>
-                <a:spcPts val="1000"/>
-              </a:spcBef>
-              <a:spcAft>
-                <a:spcPts val="0"/>
-              </a:spcAft>
-              <a:buSzPct val="80000"/>
-              <a:buChar char="►"/>
-            </a:pPr>
-            <a:r>
-              <a:rPr lang="en-US"/>
-              <a:t>指定時間區間（10:00 ~ 11:00）</a:t>
-            </a:r>
-            <a:endParaRPr/>
-          </a:p>
-          <a:p>
-            <a:pPr indent="0" lvl="0" marL="0" rtl="0" algn="l">
-              <a:lnSpc>
-                <a:spcPct val="100000"/>
-              </a:lnSpc>
-              <a:spcBef>
-                <a:spcPts val="1000"/>
-              </a:spcBef>
-              <a:spcAft>
-                <a:spcPts val="0"/>
-              </a:spcAft>
-              <a:buSzPct val="80000"/>
-              <a:buNone/>
-            </a:pPr>
-            <a:r>
-              <a:rPr lang="en-US"/>
-              <a:t>	docker logs --since "2025-10-30T10:00:00+08:00" \</a:t>
-            </a:r>
-            <a:endParaRPr/>
-          </a:p>
-          <a:p>
-            <a:pPr indent="0" lvl="0" marL="0" rtl="0" algn="l">
-              <a:lnSpc>
-                <a:spcPct val="100000"/>
-              </a:lnSpc>
-              <a:spcBef>
-                <a:spcPts val="1000"/>
-              </a:spcBef>
-              <a:spcAft>
-                <a:spcPts val="0"/>
-              </a:spcAft>
-              <a:buSzPct val="80000"/>
-              <a:buNone/>
-            </a:pPr>
-            <a:r>
-              <a:rPr lang="en-US"/>
-              <a:t>                         --until "2025-10-30T11:00:00+08:00" myapp</a:t>
-            </a:r>
-            <a:endParaRPr/>
-          </a:p>
-          <a:p>
-            <a:pPr indent="-342900" lvl="0" marL="342900" rtl="0" algn="l">
-              <a:lnSpc>
-                <a:spcPct val="100000"/>
-              </a:lnSpc>
-              <a:spcBef>
-                <a:spcPts val="1000"/>
-              </a:spcBef>
-              <a:spcAft>
-                <a:spcPts val="0"/>
-              </a:spcAft>
-              <a:buSzPct val="80000"/>
-              <a:buChar char="►"/>
-            </a:pPr>
-            <a:r>
-              <a:rPr lang="en-US"/>
-              <a:t>帶時間戳記</a:t>
-            </a:r>
-            <a:endParaRPr/>
-          </a:p>
-          <a:p>
-            <a:pPr indent="0" lvl="0" marL="0" rtl="0" algn="l">
-              <a:lnSpc>
-                <a:spcPct val="100000"/>
-              </a:lnSpc>
-              <a:spcBef>
-                <a:spcPts val="1000"/>
-              </a:spcBef>
-              <a:spcAft>
-                <a:spcPts val="0"/>
-              </a:spcAft>
-              <a:buSzPct val="80000"/>
-              <a:buNone/>
-            </a:pPr>
-            <a:r>
-              <a:rPr lang="en-US"/>
-              <a:t>	docker logs -t myapp</a:t>
-            </a:r>
-            <a:endParaRPr/>
-          </a:p>
-          <a:p>
-            <a:pPr indent="-342900" lvl="0" marL="342900" rtl="0" algn="l">
-              <a:lnSpc>
-                <a:spcPct val="100000"/>
-              </a:lnSpc>
-              <a:spcBef>
-                <a:spcPts val="1000"/>
-              </a:spcBef>
-              <a:spcAft>
-                <a:spcPts val="0"/>
-              </a:spcAft>
-              <a:buSzPct val="80000"/>
-              <a:buChar char="►"/>
-            </a:pPr>
-            <a:r>
-              <a:rPr lang="en-US"/>
-              <a:t>只看最後 50 行</a:t>
-            </a:r>
-            <a:endParaRPr/>
-          </a:p>
-          <a:p>
-            <a:pPr indent="0" lvl="0" marL="0" rtl="0" algn="l">
-              <a:lnSpc>
-                <a:spcPct val="100000"/>
-              </a:lnSpc>
-              <a:spcBef>
-                <a:spcPts val="1000"/>
-              </a:spcBef>
-              <a:spcAft>
-                <a:spcPts val="0"/>
-              </a:spcAft>
-              <a:buSzPct val="80000"/>
-              <a:buNone/>
-            </a:pPr>
-            <a:r>
-              <a:rPr lang="en-US"/>
-              <a:t>	docker logs --tail 50 myapp</a:t>
-            </a:r>
-            <a:endParaRPr/>
-          </a:p>
-          <a:p>
-            <a:pPr indent="-342900" lvl="0" marL="342900" rtl="0" algn="l">
-              <a:lnSpc>
-                <a:spcPct val="100000"/>
-              </a:lnSpc>
-              <a:spcBef>
-                <a:spcPts val="1000"/>
-              </a:spcBef>
-              <a:spcAft>
-                <a:spcPts val="0"/>
-              </a:spcAft>
-              <a:buSzPct val="80000"/>
-              <a:buChar char="►"/>
-            </a:pPr>
-            <a:r>
-              <a:rPr lang="en-US"/>
-              <a:t>請學生實際演練，各個參數差別</a:t>
-            </a:r>
-            <a:endParaRPr/>
-          </a:p>
-          <a:p>
-            <a:pPr indent="-342900" lvl="0" marL="342900" rtl="0" algn="l">
-              <a:lnSpc>
-                <a:spcPct val="100000"/>
-              </a:lnSpc>
-              <a:spcBef>
-                <a:spcPts val="1000"/>
-              </a:spcBef>
-              <a:spcAft>
-                <a:spcPts val="0"/>
-              </a:spcAft>
-              <a:buSzPct val="80000"/>
-              <a:buChar char="►"/>
-            </a:pPr>
-            <a:r>
-              <a:rPr lang="en-US"/>
-              <a:t>請學生操作memoryconfig 操作記憶體量 並且另外開一個cmd輸入docker logs來觀察</a:t>
-            </a:r>
-            <a:endParaRPr/>
-          </a:p>
-          <a:p>
-            <a:pPr indent="-258445" lvl="0" marL="342900" rtl="0" algn="l">
-              <a:lnSpc>
-                <a:spcPct val="100000"/>
-              </a:lnSpc>
-              <a:spcBef>
-                <a:spcPts val="1000"/>
-              </a:spcBef>
-              <a:spcAft>
-                <a:spcPts val="0"/>
-              </a:spcAft>
-              <a:buSzPct val="80000"/>
-              <a:buNone/>
-            </a:pPr>
-            <a:r>
-              <a:t/>
-            </a:r>
-            <a:endParaRPr/>
-          </a:p>
-        </p:txBody>
-      </p:sp>
-    </p:spTree>
-  </p:cSld>
-  <p:clrMapOvr>
-    <a:masterClrMapping/>
-  </p:clrMapOvr>
-</p:sld>
-</file>
-
-<file path=ppt/slides/slide31.xml><?xml version="1.0" encoding="utf-8"?>
-<p:sld xmlns:a="http://schemas.openxmlformats.org/drawingml/2006/main" xmlns:r="http://schemas.openxmlformats.org/officeDocument/2006/relationships" xmlns:mc="http://schemas.openxmlformats.org/markup-compatibility/2006" xmlns:mv="urn:schemas-microsoft-com:mac:vml" xmlns:p="http://schemas.openxmlformats.org/presentationml/2006/main" xmlns:c="http://schemas.openxmlformats.org/drawingml/2006/chart" xmlns:dgm="http://schemas.openxmlformats.org/drawingml/2006/diagram" xmlns:o="urn:schemas-microsoft-com:office:office" xmlns:v="urn:schemas-microsoft-com:vml" xmlns:pvml="urn:schemas-microsoft-com:office:powerpoint" xmlns:com="http://schemas.openxmlformats.org/drawingml/2006/compatibility" xmlns:p14="http://schemas.microsoft.com/office/powerpoint/2010/main" xmlns:p15="http://schemas.microsoft.com/office/powerpoint/2012/main" xmlns:ahyp="http://schemas.microsoft.com/office/drawing/2018/hyperlinkcolor">
-  <p:cSld>
-    <p:spTree>
-      <p:nvGrpSpPr>
-        <p:cNvPr id="332" name="Shape 332"/>
-        <p:cNvGrpSpPr/>
-        <p:nvPr/>
-      </p:nvGrpSpPr>
-      <p:grpSpPr>
-        <a:xfrm>
-          <a:off x="0" y="0"/>
-          <a:ext cx="0" cy="0"/>
-          <a:chOff x="0" y="0"/>
-          <a:chExt cx="0" cy="0"/>
-        </a:xfrm>
-      </p:grpSpPr>
-      <p:sp>
-        <p:nvSpPr>
-          <p:cNvPr id="333" name="Google Shape;333;p48"/>
-          <p:cNvSpPr txBox="1"/>
-          <p:nvPr>
-            <p:ph type="title"/>
-          </p:nvPr>
-        </p:nvSpPr>
-        <p:spPr>
-          <a:xfrm>
-            <a:off x="677334" y="609600"/>
-            <a:ext cx="8596668" cy="1320800"/>
-          </a:xfrm>
-          <a:prstGeom prst="rect">
-            <a:avLst/>
-          </a:prstGeom>
-          <a:noFill/>
-          <a:ln>
-            <a:noFill/>
-          </a:ln>
-        </p:spPr>
-        <p:txBody>
-          <a:bodyPr anchorCtr="0" anchor="t" bIns="45700" lIns="91425" spcFirstLastPara="1" rIns="91425" wrap="square" tIns="45700">
-            <a:normAutofit/>
-          </a:bodyPr>
-          <a:lstStyle/>
-          <a:p>
-            <a:pPr indent="0" lvl="0" marL="0" rtl="0" algn="l">
-              <a:lnSpc>
-                <a:spcPct val="100000"/>
-              </a:lnSpc>
-              <a:spcBef>
-                <a:spcPts val="0"/>
-              </a:spcBef>
-              <a:spcAft>
-                <a:spcPts val="0"/>
-              </a:spcAft>
-              <a:buClr>
-                <a:schemeClr val="accent1"/>
-              </a:buClr>
-              <a:buSzPts val="3600"/>
-              <a:buFont typeface="Trebuchet MS"/>
-              <a:buNone/>
-            </a:pPr>
-            <a:r>
-              <a:rPr lang="en-US"/>
-              <a:t>下載位置</a:t>
-            </a:r>
-            <a:endParaRPr/>
-          </a:p>
-        </p:txBody>
-      </p:sp>
-      <p:sp>
-        <p:nvSpPr>
-          <p:cNvPr id="334" name="Google Shape;334;p48"/>
-          <p:cNvSpPr txBox="1"/>
-          <p:nvPr>
-            <p:ph idx="1" type="body"/>
-          </p:nvPr>
-        </p:nvSpPr>
-        <p:spPr>
-          <a:xfrm>
-            <a:off x="677334" y="2160589"/>
-            <a:ext cx="8596668" cy="3880773"/>
-          </a:xfrm>
-          <a:prstGeom prst="rect">
-            <a:avLst/>
-          </a:prstGeom>
-          <a:noFill/>
-          <a:ln>
-            <a:noFill/>
-          </a:ln>
-        </p:spPr>
-        <p:txBody>
-          <a:bodyPr anchorCtr="0" anchor="t" bIns="45700" lIns="91425" spcFirstLastPara="1" rIns="91425" wrap="square" tIns="45700">
-            <a:normAutofit/>
-          </a:bodyPr>
-          <a:lstStyle/>
-          <a:p>
-            <a:pPr indent="-342900" lvl="0" marL="342900" rtl="0" algn="l">
-              <a:lnSpc>
-                <a:spcPct val="100000"/>
-              </a:lnSpc>
-              <a:spcBef>
-                <a:spcPts val="0"/>
-              </a:spcBef>
-              <a:spcAft>
-                <a:spcPts val="0"/>
-              </a:spcAft>
-              <a:buSzPts val="1440"/>
-              <a:buChar char="►"/>
-            </a:pPr>
-            <a:r>
-              <a:rPr b="1" lang="en-US"/>
-              <a:t>https://github.com/coolyuoo/CpuConfig 容器CPU控制原始檔</a:t>
-            </a:r>
-            <a:endParaRPr b="1"/>
-          </a:p>
-          <a:p>
-            <a:pPr indent="-342900" lvl="0" marL="342900" rtl="0" algn="l">
-              <a:lnSpc>
-                <a:spcPct val="100000"/>
-              </a:lnSpc>
-              <a:spcBef>
-                <a:spcPts val="1000"/>
-              </a:spcBef>
-              <a:spcAft>
-                <a:spcPts val="0"/>
-              </a:spcAft>
-              <a:buSzPts val="1440"/>
-              <a:buChar char="►"/>
-            </a:pPr>
-            <a:r>
-              <a:rPr b="1" lang="en-US"/>
-              <a:t>https://hub.docker.com/r/vsn80395/cpuconfig 容器CPU控制IMAGE</a:t>
-            </a:r>
-            <a:endParaRPr b="1"/>
-          </a:p>
-          <a:p>
-            <a:pPr indent="-342900" lvl="0" marL="342900" rtl="0" algn="l">
-              <a:lnSpc>
-                <a:spcPct val="100000"/>
-              </a:lnSpc>
-              <a:spcBef>
-                <a:spcPts val="1000"/>
-              </a:spcBef>
-              <a:spcAft>
-                <a:spcPts val="0"/>
-              </a:spcAft>
-              <a:buSzPts val="1440"/>
-              <a:buChar char="►"/>
-            </a:pPr>
-            <a:r>
-              <a:rPr b="1" lang="en-US"/>
-              <a:t>https://github.com/coolyuoo/MemoryConfig 容器記憶體控制原始檔</a:t>
-            </a:r>
-            <a:endParaRPr b="1"/>
-          </a:p>
-          <a:p>
-            <a:pPr indent="-342900" lvl="0" marL="342900" rtl="0" algn="l">
-              <a:lnSpc>
-                <a:spcPct val="100000"/>
-              </a:lnSpc>
-              <a:spcBef>
-                <a:spcPts val="1000"/>
-              </a:spcBef>
-              <a:spcAft>
-                <a:spcPts val="0"/>
-              </a:spcAft>
-              <a:buSzPts val="1440"/>
-              <a:buChar char="►"/>
-            </a:pPr>
-            <a:r>
-              <a:rPr b="1" lang="en-US"/>
-              <a:t>https://hub.docker.com/r/vsn80395/memoryconfig 容器記憶體控制IMAGE</a:t>
-            </a:r>
-            <a:endParaRPr b="1"/>
-          </a:p>
-          <a:p>
-            <a:pPr indent="-342900" lvl="0" marL="342900" rtl="0" algn="l">
-              <a:lnSpc>
-                <a:spcPct val="100000"/>
-              </a:lnSpc>
-              <a:spcBef>
-                <a:spcPts val="1000"/>
-              </a:spcBef>
-              <a:spcAft>
-                <a:spcPts val="0"/>
-              </a:spcAft>
-              <a:buSzPts val="1440"/>
-              <a:buChar char="►"/>
-            </a:pPr>
-            <a:r>
-              <a:rPr b="1" lang="en-US"/>
-              <a:t>https://hub.docker.com/r/vsn80395/logtest LOG產生器IMAGE</a:t>
-            </a:r>
-            <a:endParaRPr b="1"/>
-          </a:p>
-          <a:p>
-            <a:pPr indent="-251460" lvl="0" marL="342900" rtl="0" algn="l">
-              <a:lnSpc>
-                <a:spcPct val="100000"/>
-              </a:lnSpc>
-              <a:spcBef>
-                <a:spcPts val="1000"/>
-              </a:spcBef>
-              <a:spcAft>
-                <a:spcPts val="0"/>
-              </a:spcAft>
-              <a:buSzPts val="1440"/>
-              <a:buNone/>
-            </a:pPr>
-            <a:r>
-              <a:t/>
-            </a:r>
-            <a:endParaRPr b="1"/>
-          </a:p>
-          <a:p>
-            <a:pPr indent="0" lvl="0" marL="0" rtl="0" algn="l">
-              <a:lnSpc>
-                <a:spcPct val="100000"/>
-              </a:lnSpc>
-              <a:spcBef>
-                <a:spcPts val="1000"/>
-              </a:spcBef>
-              <a:spcAft>
-                <a:spcPts val="0"/>
-              </a:spcAft>
-              <a:buSzPts val="1440"/>
-              <a:buNone/>
-            </a:pPr>
-            <a:r>
-              <a:t/>
-            </a:r>
-            <a:endParaRPr b="1"/>
-          </a:p>
-          <a:p>
-            <a:pPr indent="-251460" lvl="0" marL="342900" rtl="0" algn="l">
-              <a:lnSpc>
-                <a:spcPct val="100000"/>
-              </a:lnSpc>
-              <a:spcBef>
-                <a:spcPts val="1000"/>
-              </a:spcBef>
-              <a:spcAft>
-                <a:spcPts val="0"/>
-              </a:spcAft>
-              <a:buSzPts val="1440"/>
-              <a:buNone/>
-            </a:pPr>
-            <a:r>
-              <a:t/>
-            </a:r>
-            <a:endParaRPr b="1"/>
           </a:p>
         </p:txBody>
       </p:sp>
